--- a/presentations/out/Судорожный приступ.pptx
+++ b/presentations/out/Судорожный приступ.pptx
@@ -14,6 +14,10 @@
     <p:sldId id="262" r:id="rId13"/>
     <p:sldId id="263" r:id="rId14"/>
     <p:sldId id="264" r:id="rId15"/>
+    <p:sldId id="265" r:id="rId16"/>
+    <p:sldId id="266" r:id="rId17"/>
+    <p:sldId id="267" r:id="rId18"/>
+    <p:sldId id="268" r:id="rId19"/>
   </p:sldIdLst>
   <p:sldSz cx="12191695" cy="6858000" type="screen4x3"/>
   <p:notesSz cx="6858000" cy="9144000"/>
@@ -3351,6 +3355,1744 @@
 </p:sld>
 </file>
 
+<file path=ppt/slides/slide10.xml><?xml version="1.0" encoding="utf-8"?>
+<p:sld xmlns:a="http://schemas.openxmlformats.org/drawingml/2006/main" xmlns:p="http://schemas.openxmlformats.org/presentationml/2006/main" xmlns:r="http://schemas.openxmlformats.org/officeDocument/2006/relationships">
+  <p:cSld>
+    <p:spTree>
+      <p:nvGrpSpPr>
+        <p:cNvPr id="1" name=""/>
+        <p:cNvGrpSpPr/>
+        <p:nvPr/>
+      </p:nvGrpSpPr>
+      <p:grpSpPr/>
+      <p:sp>
+        <p:nvSpPr>
+          <p:cNvPr id="2" name="Rectangle 1"/>
+          <p:cNvSpPr/>
+          <p:nvPr/>
+        </p:nvSpPr>
+        <p:spPr>
+          <a:xfrm>
+            <a:off x="0" y="0"/>
+            <a:ext cx="12191695" cy="6858000"/>
+          </a:xfrm>
+          <a:prstGeom prst="rect">
+            <a:avLst/>
+          </a:prstGeom>
+          <a:solidFill>
+            <a:srgbClr val="FFFFFF"/>
+          </a:solidFill>
+          <a:ln>
+            <a:noFill/>
+          </a:ln>
+        </p:spPr>
+        <p:style>
+          <a:lnRef idx="1">
+            <a:schemeClr val="accent1"/>
+          </a:lnRef>
+          <a:fillRef idx="3">
+            <a:schemeClr val="accent1"/>
+          </a:fillRef>
+          <a:effectRef idx="2">
+            <a:schemeClr val="accent1"/>
+          </a:effectRef>
+          <a:fontRef idx="minor">
+            <a:schemeClr val="lt1"/>
+          </a:fontRef>
+        </p:style>
+        <p:txBody>
+          <a:bodyPr rtlCol="0" anchor="ctr"/>
+          <a:lstStyle/>
+          <a:p>
+            <a:pPr algn="ctr"/>
+          </a:p>
+        </p:txBody>
+      </p:sp>
+      <p:sp>
+        <p:nvSpPr>
+          <p:cNvPr id="3" name="TextBox 2"/>
+          <p:cNvSpPr txBox="1"/>
+          <p:nvPr/>
+        </p:nvSpPr>
+        <p:spPr>
+          <a:xfrm>
+            <a:off x="700000" y="250000"/>
+            <a:ext cx="11200000" cy="550000"/>
+          </a:xfrm>
+          <a:prstGeom prst="rect">
+            <a:avLst/>
+          </a:prstGeom>
+          <a:noFill/>
+        </p:spPr>
+        <p:txBody>
+          <a:bodyPr wrap="square" anchor="t">
+            <a:spAutoFit/>
+          </a:bodyPr>
+          <a:lstStyle/>
+          <a:p>
+            <a:pPr algn="l"/>
+            <a:r>
+              <a:rPr sz="2200" b="1">
+                <a:solidFill>
+                  <a:srgbClr val="333333"/>
+                </a:solidFill>
+                <a:latin typeface="Open Sans"/>
+                <a:ea typeface="Open Sans"/>
+                <a:cs typeface="Open Sans"/>
+              </a:rPr>
+              <a:t>ВЫЗОВ И ПСИХОЛОГИЧЕСКАЯ ПОДДЕРЖКА</a:t>
+            </a:r>
+          </a:p>
+        </p:txBody>
+      </p:sp>
+      <p:sp>
+        <p:nvSpPr>
+          <p:cNvPr id="4" name="Rectangle 3"/>
+          <p:cNvSpPr/>
+          <p:nvPr/>
+        </p:nvSpPr>
+        <p:spPr>
+          <a:xfrm>
+            <a:off x="700000" y="850000"/>
+            <a:ext cx="9000000" cy="28000"/>
+          </a:xfrm>
+          <a:prstGeom prst="rect">
+            <a:avLst/>
+          </a:prstGeom>
+          <a:solidFill>
+            <a:srgbClr val="555555"/>
+          </a:solidFill>
+          <a:ln>
+            <a:noFill/>
+          </a:ln>
+        </p:spPr>
+        <p:style>
+          <a:lnRef idx="1">
+            <a:schemeClr val="accent1"/>
+          </a:lnRef>
+          <a:fillRef idx="3">
+            <a:schemeClr val="accent1"/>
+          </a:fillRef>
+          <a:effectRef idx="2">
+            <a:schemeClr val="accent1"/>
+          </a:effectRef>
+          <a:fontRef idx="minor">
+            <a:schemeClr val="lt1"/>
+          </a:fontRef>
+        </p:style>
+        <p:txBody>
+          <a:bodyPr rtlCol="0" anchor="ctr"/>
+          <a:lstStyle/>
+          <a:p>
+            <a:pPr algn="ctr"/>
+          </a:p>
+        </p:txBody>
+      </p:sp>
+      <p:sp>
+        <p:nvSpPr>
+          <p:cNvPr id="5" name="TextBox 4"/>
+          <p:cNvSpPr txBox="1"/>
+          <p:nvPr/>
+        </p:nvSpPr>
+        <p:spPr>
+          <a:xfrm>
+            <a:off x="700000" y="920000"/>
+            <a:ext cx="11000000" cy="350000"/>
+          </a:xfrm>
+          <a:prstGeom prst="rect">
+            <a:avLst/>
+          </a:prstGeom>
+          <a:noFill/>
+        </p:spPr>
+        <p:txBody>
+          <a:bodyPr wrap="square" anchor="t">
+            <a:spAutoFit/>
+          </a:bodyPr>
+          <a:lstStyle/>
+          <a:p>
+            <a:pPr algn="l"/>
+            <a:r>
+              <a:rPr sz="1200" b="0">
+                <a:solidFill>
+                  <a:srgbClr val="666666"/>
+                </a:solidFill>
+                <a:latin typeface="Open Sans"/>
+                <a:ea typeface="Open Sans"/>
+                <a:cs typeface="Open Sans"/>
+              </a:rPr>
+              <a:t>Оказание первой помощи при травмах, ранениях и поражениях, прочих состояниях</a:t>
+            </a:r>
+          </a:p>
+        </p:txBody>
+      </p:sp>
+      <p:sp>
+        <p:nvSpPr>
+          <p:cNvPr id="6" name="Rectangle 5"/>
+          <p:cNvSpPr/>
+          <p:nvPr/>
+        </p:nvSpPr>
+        <p:spPr>
+          <a:xfrm>
+            <a:off x="0" y="2800000"/>
+            <a:ext cx="420000" cy="420000"/>
+          </a:xfrm>
+          <a:prstGeom prst="rect">
+            <a:avLst/>
+          </a:prstGeom>
+          <a:solidFill>
+            <a:srgbClr val="555555"/>
+          </a:solidFill>
+          <a:ln>
+            <a:noFill/>
+          </a:ln>
+        </p:spPr>
+        <p:style>
+          <a:lnRef idx="1">
+            <a:schemeClr val="accent1"/>
+          </a:lnRef>
+          <a:fillRef idx="3">
+            <a:schemeClr val="accent1"/>
+          </a:fillRef>
+          <a:effectRef idx="2">
+            <a:schemeClr val="accent1"/>
+          </a:effectRef>
+          <a:fontRef idx="minor">
+            <a:schemeClr val="lt1"/>
+          </a:fontRef>
+        </p:style>
+        <p:txBody>
+          <a:bodyPr rtlCol="0" anchor="ctr"/>
+          <a:lstStyle/>
+          <a:p>
+            <a:pPr algn="ctr"/>
+          </a:p>
+        </p:txBody>
+      </p:sp>
+      <p:sp>
+        <p:nvSpPr>
+          <p:cNvPr id="7" name="TextBox 6"/>
+          <p:cNvSpPr txBox="1"/>
+          <p:nvPr/>
+        </p:nvSpPr>
+        <p:spPr>
+          <a:xfrm>
+            <a:off x="0" y="2800000"/>
+            <a:ext cx="420000" cy="420000"/>
+          </a:xfrm>
+          <a:prstGeom prst="rect">
+            <a:avLst/>
+          </a:prstGeom>
+          <a:noFill/>
+        </p:spPr>
+        <p:txBody>
+          <a:bodyPr wrap="square" anchor="ctr">
+            <a:spAutoFit/>
+          </a:bodyPr>
+          <a:lstStyle/>
+          <a:p>
+            <a:pPr algn="ctr"/>
+            <a:r>
+              <a:rPr sz="1400" b="1">
+                <a:solidFill>
+                  <a:srgbClr val="FFFFFF"/>
+                </a:solidFill>
+                <a:latin typeface="Open Sans"/>
+                <a:ea typeface="Open Sans"/>
+                <a:cs typeface="Open Sans"/>
+              </a:rPr>
+              <a:t>10</a:t>
+            </a:r>
+          </a:p>
+        </p:txBody>
+      </p:sp>
+      <p:sp>
+        <p:nvSpPr>
+          <p:cNvPr id="8" name="TextBox 7"/>
+          <p:cNvSpPr txBox="1"/>
+          <p:nvPr/>
+        </p:nvSpPr>
+        <p:spPr>
+          <a:xfrm>
+            <a:off x="700000" y="1450000"/>
+            <a:ext cx="11000000" cy="4000000"/>
+          </a:xfrm>
+          <a:prstGeom prst="rect">
+            <a:avLst/>
+          </a:prstGeom>
+          <a:noFill/>
+        </p:spPr>
+        <p:txBody>
+          <a:bodyPr wrap="square">
+            <a:spAutoFit/>
+          </a:bodyPr>
+          <a:lstStyle/>
+          <a:p>
+            <a:pPr algn="l">
+              <a:spcAft>
+                <a:spcPts val="800"/>
+              </a:spcAft>
+            </a:pPr>
+            <a:r>
+              <a:rPr sz="1400" b="0">
+                <a:solidFill>
+                  <a:srgbClr val="333333"/>
+                </a:solidFill>
+                <a:latin typeface="Open Sans"/>
+                <a:ea typeface="Open Sans"/>
+                <a:cs typeface="Open Sans"/>
+              </a:rPr>
+              <a:t>•  Вызовите скорую помощь при первом приступе, травме, беременности или повторных судорогах.</a:t>
+            </a:r>
+          </a:p>
+          <a:p>
+            <a:pPr algn="l">
+              <a:spcAft>
+                <a:spcPts val="800"/>
+              </a:spcAft>
+            </a:pPr>
+            <a:r>
+              <a:rPr sz="1400" b="0">
+                <a:solidFill>
+                  <a:srgbClr val="333333"/>
+                </a:solidFill>
+                <a:latin typeface="Open Sans"/>
+                <a:ea typeface="Open Sans"/>
+                <a:cs typeface="Open Sans"/>
+              </a:rPr>
+              <a:t>•  Особенно опасен длительный приступ или несколько приступов без восстановления сознания.</a:t>
+            </a:r>
+          </a:p>
+          <a:p>
+            <a:pPr algn="l">
+              <a:spcAft>
+                <a:spcPts val="800"/>
+              </a:spcAft>
+            </a:pPr>
+            <a:r>
+              <a:rPr sz="1400" b="0">
+                <a:solidFill>
+                  <a:srgbClr val="333333"/>
+                </a:solidFill>
+                <a:latin typeface="Open Sans"/>
+                <a:ea typeface="Open Sans"/>
+                <a:cs typeface="Open Sans"/>
+              </a:rPr>
+              <a:t>•  После пробуждения представьтесь и коротко объясните, что произошло.</a:t>
+            </a:r>
+          </a:p>
+          <a:p>
+            <a:pPr algn="l">
+              <a:spcAft>
+                <a:spcPts val="800"/>
+              </a:spcAft>
+            </a:pPr>
+            <a:r>
+              <a:rPr sz="1400" b="0">
+                <a:solidFill>
+                  <a:srgbClr val="333333"/>
+                </a:solidFill>
+                <a:latin typeface="Open Sans"/>
+                <a:ea typeface="Open Sans"/>
+                <a:cs typeface="Open Sans"/>
+              </a:rPr>
+              <a:t>•  Говорите спокойно, не стыдите человека и не привлекайте лишнего внимания.</a:t>
+            </a:r>
+          </a:p>
+          <a:p>
+            <a:pPr algn="l">
+              <a:spcAft>
+                <a:spcPts val="800"/>
+              </a:spcAft>
+            </a:pPr>
+            <a:r>
+              <a:rPr sz="1400" b="0">
+                <a:solidFill>
+                  <a:srgbClr val="333333"/>
+                </a:solidFill>
+                <a:latin typeface="Open Sans"/>
+                <a:ea typeface="Open Sans"/>
+                <a:cs typeface="Open Sans"/>
+              </a:rPr>
+              <a:t>•  Не позволяйте сразу вставать; обеспечьте отдых в безопасном положении.</a:t>
+            </a:r>
+          </a:p>
+          <a:p>
+            <a:pPr algn="l">
+              <a:spcAft>
+                <a:spcPts val="800"/>
+              </a:spcAft>
+            </a:pPr>
+            <a:r>
+              <a:rPr sz="1400" b="0">
+                <a:solidFill>
+                  <a:srgbClr val="333333"/>
+                </a:solidFill>
+                <a:latin typeface="Open Sans"/>
+                <a:ea typeface="Open Sans"/>
+                <a:cs typeface="Open Sans"/>
+              </a:rPr>
+              <a:t>•  Передайте специалистам длительность, число приступов, травмы и оказанную помощь.</a:t>
+            </a:r>
+          </a:p>
+        </p:txBody>
+      </p:sp>
+    </p:spTree>
+  </p:cSld>
+  <p:clrMapOvr>
+    <a:masterClrMapping/>
+  </p:clrMapOvr>
+</p:sld>
+</file>
+
+<file path=ppt/slides/slide11.xml><?xml version="1.0" encoding="utf-8"?>
+<p:sld xmlns:a="http://schemas.openxmlformats.org/drawingml/2006/main" xmlns:p="http://schemas.openxmlformats.org/presentationml/2006/main" xmlns:r="http://schemas.openxmlformats.org/officeDocument/2006/relationships">
+  <p:cSld>
+    <p:spTree>
+      <p:nvGrpSpPr>
+        <p:cNvPr id="1" name=""/>
+        <p:cNvGrpSpPr/>
+        <p:nvPr/>
+      </p:nvGrpSpPr>
+      <p:grpSpPr/>
+      <p:sp>
+        <p:nvSpPr>
+          <p:cNvPr id="2" name="Rectangle 1"/>
+          <p:cNvSpPr/>
+          <p:nvPr/>
+        </p:nvSpPr>
+        <p:spPr>
+          <a:xfrm>
+            <a:off x="0" y="0"/>
+            <a:ext cx="12191695" cy="6858000"/>
+          </a:xfrm>
+          <a:prstGeom prst="rect">
+            <a:avLst/>
+          </a:prstGeom>
+          <a:solidFill>
+            <a:srgbClr val="FFFFFF"/>
+          </a:solidFill>
+          <a:ln>
+            <a:noFill/>
+          </a:ln>
+        </p:spPr>
+        <p:style>
+          <a:lnRef idx="1">
+            <a:schemeClr val="accent1"/>
+          </a:lnRef>
+          <a:fillRef idx="3">
+            <a:schemeClr val="accent1"/>
+          </a:fillRef>
+          <a:effectRef idx="2">
+            <a:schemeClr val="accent1"/>
+          </a:effectRef>
+          <a:fontRef idx="minor">
+            <a:schemeClr val="lt1"/>
+          </a:fontRef>
+        </p:style>
+        <p:txBody>
+          <a:bodyPr rtlCol="0" anchor="ctr"/>
+          <a:lstStyle/>
+          <a:p>
+            <a:pPr algn="ctr"/>
+          </a:p>
+        </p:txBody>
+      </p:sp>
+      <p:sp>
+        <p:nvSpPr>
+          <p:cNvPr id="3" name="TextBox 2"/>
+          <p:cNvSpPr txBox="1"/>
+          <p:nvPr/>
+        </p:nvSpPr>
+        <p:spPr>
+          <a:xfrm>
+            <a:off x="700000" y="250000"/>
+            <a:ext cx="11200000" cy="550000"/>
+          </a:xfrm>
+          <a:prstGeom prst="rect">
+            <a:avLst/>
+          </a:prstGeom>
+          <a:noFill/>
+        </p:spPr>
+        <p:txBody>
+          <a:bodyPr wrap="square" anchor="t">
+            <a:spAutoFit/>
+          </a:bodyPr>
+          <a:lstStyle/>
+          <a:p>
+            <a:pPr algn="l"/>
+            <a:r>
+              <a:rPr sz="2200" b="1">
+                <a:solidFill>
+                  <a:srgbClr val="333333"/>
+                </a:solidFill>
+                <a:latin typeface="Open Sans"/>
+                <a:ea typeface="Open Sans"/>
+                <a:cs typeface="Open Sans"/>
+              </a:rPr>
+              <a:t>ГЛАВНОЕ ЗАПОМНИТЬ</a:t>
+            </a:r>
+          </a:p>
+        </p:txBody>
+      </p:sp>
+      <p:sp>
+        <p:nvSpPr>
+          <p:cNvPr id="4" name="Rectangle 3"/>
+          <p:cNvSpPr/>
+          <p:nvPr/>
+        </p:nvSpPr>
+        <p:spPr>
+          <a:xfrm>
+            <a:off x="700000" y="850000"/>
+            <a:ext cx="9000000" cy="28000"/>
+          </a:xfrm>
+          <a:prstGeom prst="rect">
+            <a:avLst/>
+          </a:prstGeom>
+          <a:solidFill>
+            <a:srgbClr val="555555"/>
+          </a:solidFill>
+          <a:ln>
+            <a:noFill/>
+          </a:ln>
+        </p:spPr>
+        <p:style>
+          <a:lnRef idx="1">
+            <a:schemeClr val="accent1"/>
+          </a:lnRef>
+          <a:fillRef idx="3">
+            <a:schemeClr val="accent1"/>
+          </a:fillRef>
+          <a:effectRef idx="2">
+            <a:schemeClr val="accent1"/>
+          </a:effectRef>
+          <a:fontRef idx="minor">
+            <a:schemeClr val="lt1"/>
+          </a:fontRef>
+        </p:style>
+        <p:txBody>
+          <a:bodyPr rtlCol="0" anchor="ctr"/>
+          <a:lstStyle/>
+          <a:p>
+            <a:pPr algn="ctr"/>
+          </a:p>
+        </p:txBody>
+      </p:sp>
+      <p:sp>
+        <p:nvSpPr>
+          <p:cNvPr id="5" name="TextBox 4"/>
+          <p:cNvSpPr txBox="1"/>
+          <p:nvPr/>
+        </p:nvSpPr>
+        <p:spPr>
+          <a:xfrm>
+            <a:off x="700000" y="920000"/>
+            <a:ext cx="11000000" cy="350000"/>
+          </a:xfrm>
+          <a:prstGeom prst="rect">
+            <a:avLst/>
+          </a:prstGeom>
+          <a:noFill/>
+        </p:spPr>
+        <p:txBody>
+          <a:bodyPr wrap="square" anchor="t">
+            <a:spAutoFit/>
+          </a:bodyPr>
+          <a:lstStyle/>
+          <a:p>
+            <a:pPr algn="l"/>
+            <a:r>
+              <a:rPr sz="1200" b="0">
+                <a:solidFill>
+                  <a:srgbClr val="666666"/>
+                </a:solidFill>
+                <a:latin typeface="Open Sans"/>
+                <a:ea typeface="Open Sans"/>
+                <a:cs typeface="Open Sans"/>
+              </a:rPr>
+              <a:t>Оказание первой помощи при травмах, ранениях и поражениях, прочих состояниях</a:t>
+            </a:r>
+          </a:p>
+        </p:txBody>
+      </p:sp>
+      <p:sp>
+        <p:nvSpPr>
+          <p:cNvPr id="6" name="Rectangle 5"/>
+          <p:cNvSpPr/>
+          <p:nvPr/>
+        </p:nvSpPr>
+        <p:spPr>
+          <a:xfrm>
+            <a:off x="0" y="2800000"/>
+            <a:ext cx="420000" cy="420000"/>
+          </a:xfrm>
+          <a:prstGeom prst="rect">
+            <a:avLst/>
+          </a:prstGeom>
+          <a:solidFill>
+            <a:srgbClr val="555555"/>
+          </a:solidFill>
+          <a:ln>
+            <a:noFill/>
+          </a:ln>
+        </p:spPr>
+        <p:style>
+          <a:lnRef idx="1">
+            <a:schemeClr val="accent1"/>
+          </a:lnRef>
+          <a:fillRef idx="3">
+            <a:schemeClr val="accent1"/>
+          </a:fillRef>
+          <a:effectRef idx="2">
+            <a:schemeClr val="accent1"/>
+          </a:effectRef>
+          <a:fontRef idx="minor">
+            <a:schemeClr val="lt1"/>
+          </a:fontRef>
+        </p:style>
+        <p:txBody>
+          <a:bodyPr rtlCol="0" anchor="ctr"/>
+          <a:lstStyle/>
+          <a:p>
+            <a:pPr algn="ctr"/>
+          </a:p>
+        </p:txBody>
+      </p:sp>
+      <p:sp>
+        <p:nvSpPr>
+          <p:cNvPr id="7" name="TextBox 6"/>
+          <p:cNvSpPr txBox="1"/>
+          <p:nvPr/>
+        </p:nvSpPr>
+        <p:spPr>
+          <a:xfrm>
+            <a:off x="0" y="2800000"/>
+            <a:ext cx="420000" cy="420000"/>
+          </a:xfrm>
+          <a:prstGeom prst="rect">
+            <a:avLst/>
+          </a:prstGeom>
+          <a:noFill/>
+        </p:spPr>
+        <p:txBody>
+          <a:bodyPr wrap="square" anchor="ctr">
+            <a:spAutoFit/>
+          </a:bodyPr>
+          <a:lstStyle/>
+          <a:p>
+            <a:pPr algn="ctr"/>
+            <a:r>
+              <a:rPr sz="1400" b="1">
+                <a:solidFill>
+                  <a:srgbClr val="FFFFFF"/>
+                </a:solidFill>
+                <a:latin typeface="Open Sans"/>
+                <a:ea typeface="Open Sans"/>
+                <a:cs typeface="Open Sans"/>
+              </a:rPr>
+              <a:t>11</a:t>
+            </a:r>
+          </a:p>
+        </p:txBody>
+      </p:sp>
+      <p:sp>
+        <p:nvSpPr>
+          <p:cNvPr id="8" name="Rectangle 7"/>
+          <p:cNvSpPr/>
+          <p:nvPr/>
+        </p:nvSpPr>
+        <p:spPr>
+          <a:xfrm>
+            <a:off x="700000" y="1450000"/>
+            <a:ext cx="11000000" cy="850000"/>
+          </a:xfrm>
+          <a:prstGeom prst="rect">
+            <a:avLst/>
+          </a:prstGeom>
+          <a:solidFill>
+            <a:srgbClr val="FFFFFF"/>
+          </a:solidFill>
+          <a:ln w="12700">
+            <a:solidFill>
+              <a:srgbClr val="999999"/>
+            </a:solidFill>
+          </a:ln>
+        </p:spPr>
+        <p:style>
+          <a:lnRef idx="1">
+            <a:schemeClr val="accent1"/>
+          </a:lnRef>
+          <a:fillRef idx="3">
+            <a:schemeClr val="accent1"/>
+          </a:fillRef>
+          <a:effectRef idx="2">
+            <a:schemeClr val="accent1"/>
+          </a:effectRef>
+          <a:fontRef idx="minor">
+            <a:schemeClr val="lt1"/>
+          </a:fontRef>
+        </p:style>
+        <p:txBody>
+          <a:bodyPr rtlCol="0" anchor="ctr"/>
+          <a:lstStyle/>
+          <a:p>
+            <a:pPr algn="ctr"/>
+          </a:p>
+        </p:txBody>
+      </p:sp>
+      <p:sp>
+        <p:nvSpPr>
+          <p:cNvPr id="9" name="Rectangle 8"/>
+          <p:cNvSpPr/>
+          <p:nvPr/>
+        </p:nvSpPr>
+        <p:spPr>
+          <a:xfrm>
+            <a:off x="700000" y="1450000"/>
+            <a:ext cx="90000" cy="850000"/>
+          </a:xfrm>
+          <a:prstGeom prst="rect">
+            <a:avLst/>
+          </a:prstGeom>
+          <a:solidFill>
+            <a:srgbClr val="CC0000"/>
+          </a:solidFill>
+          <a:ln>
+            <a:noFill/>
+          </a:ln>
+        </p:spPr>
+        <p:style>
+          <a:lnRef idx="1">
+            <a:schemeClr val="accent1"/>
+          </a:lnRef>
+          <a:fillRef idx="3">
+            <a:schemeClr val="accent1"/>
+          </a:fillRef>
+          <a:effectRef idx="2">
+            <a:schemeClr val="accent1"/>
+          </a:effectRef>
+          <a:fontRef idx="minor">
+            <a:schemeClr val="lt1"/>
+          </a:fontRef>
+        </p:style>
+        <p:txBody>
+          <a:bodyPr rtlCol="0" anchor="ctr"/>
+          <a:lstStyle/>
+          <a:p>
+            <a:pPr algn="ctr"/>
+          </a:p>
+        </p:txBody>
+      </p:sp>
+      <p:sp>
+        <p:nvSpPr>
+          <p:cNvPr id="10" name="TextBox 9"/>
+          <p:cNvSpPr txBox="1"/>
+          <p:nvPr/>
+        </p:nvSpPr>
+        <p:spPr>
+          <a:xfrm>
+            <a:off x="1000000" y="1530000"/>
+            <a:ext cx="10400000" cy="690000"/>
+          </a:xfrm>
+          <a:prstGeom prst="rect">
+            <a:avLst/>
+          </a:prstGeom>
+          <a:noFill/>
+        </p:spPr>
+        <p:txBody>
+          <a:bodyPr wrap="square" anchor="ctr">
+            <a:spAutoFit/>
+          </a:bodyPr>
+          <a:lstStyle/>
+          <a:p>
+            <a:pPr algn="l"/>
+            <a:r>
+              <a:rPr sz="1300" b="0">
+                <a:solidFill>
+                  <a:srgbClr val="333333"/>
+                </a:solidFill>
+                <a:latin typeface="Open Sans"/>
+                <a:ea typeface="Open Sans"/>
+                <a:cs typeface="Open Sans"/>
+              </a:rPr>
+              <a:t>Уберите опасные предметы и защитите голову</a:t>
+            </a:r>
+          </a:p>
+        </p:txBody>
+      </p:sp>
+      <p:sp>
+        <p:nvSpPr>
+          <p:cNvPr id="11" name="Rectangle 10"/>
+          <p:cNvSpPr/>
+          <p:nvPr/>
+        </p:nvSpPr>
+        <p:spPr>
+          <a:xfrm>
+            <a:off x="700000" y="2380000"/>
+            <a:ext cx="11000000" cy="850000"/>
+          </a:xfrm>
+          <a:prstGeom prst="rect">
+            <a:avLst/>
+          </a:prstGeom>
+          <a:solidFill>
+            <a:srgbClr val="FFFFFF"/>
+          </a:solidFill>
+          <a:ln w="12700">
+            <a:solidFill>
+              <a:srgbClr val="999999"/>
+            </a:solidFill>
+          </a:ln>
+        </p:spPr>
+        <p:style>
+          <a:lnRef idx="1">
+            <a:schemeClr val="accent1"/>
+          </a:lnRef>
+          <a:fillRef idx="3">
+            <a:schemeClr val="accent1"/>
+          </a:fillRef>
+          <a:effectRef idx="2">
+            <a:schemeClr val="accent1"/>
+          </a:effectRef>
+          <a:fontRef idx="minor">
+            <a:schemeClr val="lt1"/>
+          </a:fontRef>
+        </p:style>
+        <p:txBody>
+          <a:bodyPr rtlCol="0" anchor="ctr"/>
+          <a:lstStyle/>
+          <a:p>
+            <a:pPr algn="ctr"/>
+          </a:p>
+        </p:txBody>
+      </p:sp>
+      <p:sp>
+        <p:nvSpPr>
+          <p:cNvPr id="12" name="Rectangle 11"/>
+          <p:cNvSpPr/>
+          <p:nvPr/>
+        </p:nvSpPr>
+        <p:spPr>
+          <a:xfrm>
+            <a:off x="700000" y="2380000"/>
+            <a:ext cx="90000" cy="850000"/>
+          </a:xfrm>
+          <a:prstGeom prst="rect">
+            <a:avLst/>
+          </a:prstGeom>
+          <a:solidFill>
+            <a:srgbClr val="CC0000"/>
+          </a:solidFill>
+          <a:ln>
+            <a:noFill/>
+          </a:ln>
+        </p:spPr>
+        <p:style>
+          <a:lnRef idx="1">
+            <a:schemeClr val="accent1"/>
+          </a:lnRef>
+          <a:fillRef idx="3">
+            <a:schemeClr val="accent1"/>
+          </a:fillRef>
+          <a:effectRef idx="2">
+            <a:schemeClr val="accent1"/>
+          </a:effectRef>
+          <a:fontRef idx="minor">
+            <a:schemeClr val="lt1"/>
+          </a:fontRef>
+        </p:style>
+        <p:txBody>
+          <a:bodyPr rtlCol="0" anchor="ctr"/>
+          <a:lstStyle/>
+          <a:p>
+            <a:pPr algn="ctr"/>
+          </a:p>
+        </p:txBody>
+      </p:sp>
+      <p:sp>
+        <p:nvSpPr>
+          <p:cNvPr id="13" name="TextBox 12"/>
+          <p:cNvSpPr txBox="1"/>
+          <p:nvPr/>
+        </p:nvSpPr>
+        <p:spPr>
+          <a:xfrm>
+            <a:off x="1000000" y="2460000"/>
+            <a:ext cx="10400000" cy="690000"/>
+          </a:xfrm>
+          <a:prstGeom prst="rect">
+            <a:avLst/>
+          </a:prstGeom>
+          <a:noFill/>
+        </p:spPr>
+        <p:txBody>
+          <a:bodyPr wrap="square" anchor="ctr">
+            <a:spAutoFit/>
+          </a:bodyPr>
+          <a:lstStyle/>
+          <a:p>
+            <a:pPr algn="l"/>
+            <a:r>
+              <a:rPr sz="1300" b="0">
+                <a:solidFill>
+                  <a:srgbClr val="333333"/>
+                </a:solidFill>
+                <a:latin typeface="Open Sans"/>
+                <a:ea typeface="Open Sans"/>
+                <a:cs typeface="Open Sans"/>
+              </a:rPr>
+              <a:t>Не удерживайте человека и ничего не кладите ему в рот</a:t>
+            </a:r>
+          </a:p>
+        </p:txBody>
+      </p:sp>
+      <p:sp>
+        <p:nvSpPr>
+          <p:cNvPr id="14" name="Rectangle 13"/>
+          <p:cNvSpPr/>
+          <p:nvPr/>
+        </p:nvSpPr>
+        <p:spPr>
+          <a:xfrm>
+            <a:off x="700000" y="3310000"/>
+            <a:ext cx="11000000" cy="850000"/>
+          </a:xfrm>
+          <a:prstGeom prst="rect">
+            <a:avLst/>
+          </a:prstGeom>
+          <a:solidFill>
+            <a:srgbClr val="FFFFFF"/>
+          </a:solidFill>
+          <a:ln w="12700">
+            <a:solidFill>
+              <a:srgbClr val="999999"/>
+            </a:solidFill>
+          </a:ln>
+        </p:spPr>
+        <p:style>
+          <a:lnRef idx="1">
+            <a:schemeClr val="accent1"/>
+          </a:lnRef>
+          <a:fillRef idx="3">
+            <a:schemeClr val="accent1"/>
+          </a:fillRef>
+          <a:effectRef idx="2">
+            <a:schemeClr val="accent1"/>
+          </a:effectRef>
+          <a:fontRef idx="minor">
+            <a:schemeClr val="lt1"/>
+          </a:fontRef>
+        </p:style>
+        <p:txBody>
+          <a:bodyPr rtlCol="0" anchor="ctr"/>
+          <a:lstStyle/>
+          <a:p>
+            <a:pPr algn="ctr"/>
+          </a:p>
+        </p:txBody>
+      </p:sp>
+      <p:sp>
+        <p:nvSpPr>
+          <p:cNvPr id="15" name="Rectangle 14"/>
+          <p:cNvSpPr/>
+          <p:nvPr/>
+        </p:nvSpPr>
+        <p:spPr>
+          <a:xfrm>
+            <a:off x="700000" y="3310000"/>
+            <a:ext cx="90000" cy="850000"/>
+          </a:xfrm>
+          <a:prstGeom prst="rect">
+            <a:avLst/>
+          </a:prstGeom>
+          <a:solidFill>
+            <a:srgbClr val="CC0000"/>
+          </a:solidFill>
+          <a:ln>
+            <a:noFill/>
+          </a:ln>
+        </p:spPr>
+        <p:style>
+          <a:lnRef idx="1">
+            <a:schemeClr val="accent1"/>
+          </a:lnRef>
+          <a:fillRef idx="3">
+            <a:schemeClr val="accent1"/>
+          </a:fillRef>
+          <a:effectRef idx="2">
+            <a:schemeClr val="accent1"/>
+          </a:effectRef>
+          <a:fontRef idx="minor">
+            <a:schemeClr val="lt1"/>
+          </a:fontRef>
+        </p:style>
+        <p:txBody>
+          <a:bodyPr rtlCol="0" anchor="ctr"/>
+          <a:lstStyle/>
+          <a:p>
+            <a:pPr algn="ctr"/>
+          </a:p>
+        </p:txBody>
+      </p:sp>
+      <p:sp>
+        <p:nvSpPr>
+          <p:cNvPr id="16" name="TextBox 15"/>
+          <p:cNvSpPr txBox="1"/>
+          <p:nvPr/>
+        </p:nvSpPr>
+        <p:spPr>
+          <a:xfrm>
+            <a:off x="1000000" y="3390000"/>
+            <a:ext cx="10400000" cy="690000"/>
+          </a:xfrm>
+          <a:prstGeom prst="rect">
+            <a:avLst/>
+          </a:prstGeom>
+          <a:noFill/>
+        </p:spPr>
+        <p:txBody>
+          <a:bodyPr wrap="square" anchor="ctr">
+            <a:spAutoFit/>
+          </a:bodyPr>
+          <a:lstStyle/>
+          <a:p>
+            <a:pPr algn="l"/>
+            <a:r>
+              <a:rPr sz="1300" b="0">
+                <a:solidFill>
+                  <a:srgbClr val="333333"/>
+                </a:solidFill>
+                <a:latin typeface="Open Sans"/>
+                <a:ea typeface="Open Sans"/>
+                <a:cs typeface="Open Sans"/>
+              </a:rPr>
+              <a:t>Отметьте продолжительность приступа</a:t>
+            </a:r>
+          </a:p>
+        </p:txBody>
+      </p:sp>
+      <p:sp>
+        <p:nvSpPr>
+          <p:cNvPr id="17" name="Rectangle 16"/>
+          <p:cNvSpPr/>
+          <p:nvPr/>
+        </p:nvSpPr>
+        <p:spPr>
+          <a:xfrm>
+            <a:off x="700000" y="4240000"/>
+            <a:ext cx="11000000" cy="850000"/>
+          </a:xfrm>
+          <a:prstGeom prst="rect">
+            <a:avLst/>
+          </a:prstGeom>
+          <a:solidFill>
+            <a:srgbClr val="FFFFFF"/>
+          </a:solidFill>
+          <a:ln w="12700">
+            <a:solidFill>
+              <a:srgbClr val="999999"/>
+            </a:solidFill>
+          </a:ln>
+        </p:spPr>
+        <p:style>
+          <a:lnRef idx="1">
+            <a:schemeClr val="accent1"/>
+          </a:lnRef>
+          <a:fillRef idx="3">
+            <a:schemeClr val="accent1"/>
+          </a:fillRef>
+          <a:effectRef idx="2">
+            <a:schemeClr val="accent1"/>
+          </a:effectRef>
+          <a:fontRef idx="minor">
+            <a:schemeClr val="lt1"/>
+          </a:fontRef>
+        </p:style>
+        <p:txBody>
+          <a:bodyPr rtlCol="0" anchor="ctr"/>
+          <a:lstStyle/>
+          <a:p>
+            <a:pPr algn="ctr"/>
+          </a:p>
+        </p:txBody>
+      </p:sp>
+      <p:sp>
+        <p:nvSpPr>
+          <p:cNvPr id="18" name="Rectangle 17"/>
+          <p:cNvSpPr/>
+          <p:nvPr/>
+        </p:nvSpPr>
+        <p:spPr>
+          <a:xfrm>
+            <a:off x="700000" y="4240000"/>
+            <a:ext cx="90000" cy="850000"/>
+          </a:xfrm>
+          <a:prstGeom prst="rect">
+            <a:avLst/>
+          </a:prstGeom>
+          <a:solidFill>
+            <a:srgbClr val="CC0000"/>
+          </a:solidFill>
+          <a:ln>
+            <a:noFill/>
+          </a:ln>
+        </p:spPr>
+        <p:style>
+          <a:lnRef idx="1">
+            <a:schemeClr val="accent1"/>
+          </a:lnRef>
+          <a:fillRef idx="3">
+            <a:schemeClr val="accent1"/>
+          </a:fillRef>
+          <a:effectRef idx="2">
+            <a:schemeClr val="accent1"/>
+          </a:effectRef>
+          <a:fontRef idx="minor">
+            <a:schemeClr val="lt1"/>
+          </a:fontRef>
+        </p:style>
+        <p:txBody>
+          <a:bodyPr rtlCol="0" anchor="ctr"/>
+          <a:lstStyle/>
+          <a:p>
+            <a:pPr algn="ctr"/>
+          </a:p>
+        </p:txBody>
+      </p:sp>
+      <p:sp>
+        <p:nvSpPr>
+          <p:cNvPr id="19" name="TextBox 18"/>
+          <p:cNvSpPr txBox="1"/>
+          <p:nvPr/>
+        </p:nvSpPr>
+        <p:spPr>
+          <a:xfrm>
+            <a:off x="1000000" y="4320000"/>
+            <a:ext cx="10400000" cy="690000"/>
+          </a:xfrm>
+          <a:prstGeom prst="rect">
+            <a:avLst/>
+          </a:prstGeom>
+          <a:noFill/>
+        </p:spPr>
+        <p:txBody>
+          <a:bodyPr wrap="square" anchor="ctr">
+            <a:spAutoFit/>
+          </a:bodyPr>
+          <a:lstStyle/>
+          <a:p>
+            <a:pPr algn="l"/>
+            <a:r>
+              <a:rPr sz="1300" b="0">
+                <a:solidFill>
+                  <a:srgbClr val="333333"/>
+                </a:solidFill>
+                <a:latin typeface="Open Sans"/>
+                <a:ea typeface="Open Sans"/>
+                <a:cs typeface="Open Sans"/>
+              </a:rPr>
+              <a:t>После судорог проверьте дыхание и травмы</a:t>
+            </a:r>
+          </a:p>
+        </p:txBody>
+      </p:sp>
+      <p:sp>
+        <p:nvSpPr>
+          <p:cNvPr id="20" name="Rectangle 19"/>
+          <p:cNvSpPr/>
+          <p:nvPr/>
+        </p:nvSpPr>
+        <p:spPr>
+          <a:xfrm>
+            <a:off x="700000" y="5170000"/>
+            <a:ext cx="11000000" cy="850000"/>
+          </a:xfrm>
+          <a:prstGeom prst="rect">
+            <a:avLst/>
+          </a:prstGeom>
+          <a:solidFill>
+            <a:srgbClr val="FFFFFF"/>
+          </a:solidFill>
+          <a:ln w="12700">
+            <a:solidFill>
+              <a:srgbClr val="999999"/>
+            </a:solidFill>
+          </a:ln>
+        </p:spPr>
+        <p:style>
+          <a:lnRef idx="1">
+            <a:schemeClr val="accent1"/>
+          </a:lnRef>
+          <a:fillRef idx="3">
+            <a:schemeClr val="accent1"/>
+          </a:fillRef>
+          <a:effectRef idx="2">
+            <a:schemeClr val="accent1"/>
+          </a:effectRef>
+          <a:fontRef idx="minor">
+            <a:schemeClr val="lt1"/>
+          </a:fontRef>
+        </p:style>
+        <p:txBody>
+          <a:bodyPr rtlCol="0" anchor="ctr"/>
+          <a:lstStyle/>
+          <a:p>
+            <a:pPr algn="ctr"/>
+          </a:p>
+        </p:txBody>
+      </p:sp>
+      <p:sp>
+        <p:nvSpPr>
+          <p:cNvPr id="21" name="Rectangle 20"/>
+          <p:cNvSpPr/>
+          <p:nvPr/>
+        </p:nvSpPr>
+        <p:spPr>
+          <a:xfrm>
+            <a:off x="700000" y="5170000"/>
+            <a:ext cx="90000" cy="850000"/>
+          </a:xfrm>
+          <a:prstGeom prst="rect">
+            <a:avLst/>
+          </a:prstGeom>
+          <a:solidFill>
+            <a:srgbClr val="CC0000"/>
+          </a:solidFill>
+          <a:ln>
+            <a:noFill/>
+          </a:ln>
+        </p:spPr>
+        <p:style>
+          <a:lnRef idx="1">
+            <a:schemeClr val="accent1"/>
+          </a:lnRef>
+          <a:fillRef idx="3">
+            <a:schemeClr val="accent1"/>
+          </a:fillRef>
+          <a:effectRef idx="2">
+            <a:schemeClr val="accent1"/>
+          </a:effectRef>
+          <a:fontRef idx="minor">
+            <a:schemeClr val="lt1"/>
+          </a:fontRef>
+        </p:style>
+        <p:txBody>
+          <a:bodyPr rtlCol="0" anchor="ctr"/>
+          <a:lstStyle/>
+          <a:p>
+            <a:pPr algn="ctr"/>
+          </a:p>
+        </p:txBody>
+      </p:sp>
+      <p:sp>
+        <p:nvSpPr>
+          <p:cNvPr id="22" name="TextBox 21"/>
+          <p:cNvSpPr txBox="1"/>
+          <p:nvPr/>
+        </p:nvSpPr>
+        <p:spPr>
+          <a:xfrm>
+            <a:off x="1000000" y="5250000"/>
+            <a:ext cx="10400000" cy="690000"/>
+          </a:xfrm>
+          <a:prstGeom prst="rect">
+            <a:avLst/>
+          </a:prstGeom>
+          <a:noFill/>
+        </p:spPr>
+        <p:txBody>
+          <a:bodyPr wrap="square" anchor="ctr">
+            <a:spAutoFit/>
+          </a:bodyPr>
+          <a:lstStyle/>
+          <a:p>
+            <a:pPr algn="l"/>
+            <a:r>
+              <a:rPr sz="1300" b="0">
+                <a:solidFill>
+                  <a:srgbClr val="333333"/>
+                </a:solidFill>
+                <a:latin typeface="Open Sans"/>
+                <a:ea typeface="Open Sans"/>
+                <a:cs typeface="Open Sans"/>
+              </a:rPr>
+              <a:t>Дышит — уложите на бок и оставайтесь рядом</a:t>
+            </a:r>
+          </a:p>
+        </p:txBody>
+      </p:sp>
+    </p:spTree>
+  </p:cSld>
+  <p:clrMapOvr>
+    <a:masterClrMapping/>
+  </p:clrMapOvr>
+</p:sld>
+</file>
+
+<file path=ppt/slides/slide12.xml><?xml version="1.0" encoding="utf-8"?>
+<p:sld xmlns:a="http://schemas.openxmlformats.org/drawingml/2006/main" xmlns:p="http://schemas.openxmlformats.org/presentationml/2006/main" xmlns:r="http://schemas.openxmlformats.org/officeDocument/2006/relationships">
+  <p:cSld>
+    <p:spTree>
+      <p:nvGrpSpPr>
+        <p:cNvPr id="1" name=""/>
+        <p:cNvGrpSpPr/>
+        <p:nvPr/>
+      </p:nvGrpSpPr>
+      <p:grpSpPr/>
+      <p:sp>
+        <p:nvSpPr>
+          <p:cNvPr id="2" name="Rectangle 1"/>
+          <p:cNvSpPr/>
+          <p:nvPr/>
+        </p:nvSpPr>
+        <p:spPr>
+          <a:xfrm>
+            <a:off x="0" y="0"/>
+            <a:ext cx="12191695" cy="6858000"/>
+          </a:xfrm>
+          <a:prstGeom prst="rect">
+            <a:avLst/>
+          </a:prstGeom>
+          <a:solidFill>
+            <a:srgbClr val="FFFFFF"/>
+          </a:solidFill>
+          <a:ln>
+            <a:noFill/>
+          </a:ln>
+        </p:spPr>
+        <p:style>
+          <a:lnRef idx="1">
+            <a:schemeClr val="accent1"/>
+          </a:lnRef>
+          <a:fillRef idx="3">
+            <a:schemeClr val="accent1"/>
+          </a:fillRef>
+          <a:effectRef idx="2">
+            <a:schemeClr val="accent1"/>
+          </a:effectRef>
+          <a:fontRef idx="minor">
+            <a:schemeClr val="lt1"/>
+          </a:fontRef>
+        </p:style>
+        <p:txBody>
+          <a:bodyPr rtlCol="0" anchor="ctr"/>
+          <a:lstStyle/>
+          <a:p>
+            <a:pPr algn="ctr"/>
+          </a:p>
+        </p:txBody>
+      </p:sp>
+      <p:sp>
+        <p:nvSpPr>
+          <p:cNvPr id="3" name="TextBox 2"/>
+          <p:cNvSpPr txBox="1"/>
+          <p:nvPr/>
+        </p:nvSpPr>
+        <p:spPr>
+          <a:xfrm>
+            <a:off x="700000" y="250000"/>
+            <a:ext cx="11200000" cy="550000"/>
+          </a:xfrm>
+          <a:prstGeom prst="rect">
+            <a:avLst/>
+          </a:prstGeom>
+          <a:noFill/>
+        </p:spPr>
+        <p:txBody>
+          <a:bodyPr wrap="square" anchor="t">
+            <a:spAutoFit/>
+          </a:bodyPr>
+          <a:lstStyle/>
+          <a:p>
+            <a:pPr algn="l"/>
+            <a:r>
+              <a:rPr sz="2200" b="1">
+                <a:solidFill>
+                  <a:srgbClr val="333333"/>
+                </a:solidFill>
+                <a:latin typeface="Open Sans"/>
+                <a:ea typeface="Open Sans"/>
+                <a:cs typeface="Open Sans"/>
+              </a:rPr>
+              <a:t>ПАМЯТКА</a:t>
+            </a:r>
+          </a:p>
+        </p:txBody>
+      </p:sp>
+      <p:sp>
+        <p:nvSpPr>
+          <p:cNvPr id="4" name="Rectangle 3"/>
+          <p:cNvSpPr/>
+          <p:nvPr/>
+        </p:nvSpPr>
+        <p:spPr>
+          <a:xfrm>
+            <a:off x="700000" y="850000"/>
+            <a:ext cx="9000000" cy="28000"/>
+          </a:xfrm>
+          <a:prstGeom prst="rect">
+            <a:avLst/>
+          </a:prstGeom>
+          <a:solidFill>
+            <a:srgbClr val="555555"/>
+          </a:solidFill>
+          <a:ln>
+            <a:noFill/>
+          </a:ln>
+        </p:spPr>
+        <p:style>
+          <a:lnRef idx="1">
+            <a:schemeClr val="accent1"/>
+          </a:lnRef>
+          <a:fillRef idx="3">
+            <a:schemeClr val="accent1"/>
+          </a:fillRef>
+          <a:effectRef idx="2">
+            <a:schemeClr val="accent1"/>
+          </a:effectRef>
+          <a:fontRef idx="minor">
+            <a:schemeClr val="lt1"/>
+          </a:fontRef>
+        </p:style>
+        <p:txBody>
+          <a:bodyPr rtlCol="0" anchor="ctr"/>
+          <a:lstStyle/>
+          <a:p>
+            <a:pPr algn="ctr"/>
+          </a:p>
+        </p:txBody>
+      </p:sp>
+      <p:sp>
+        <p:nvSpPr>
+          <p:cNvPr id="5" name="TextBox 4"/>
+          <p:cNvSpPr txBox="1"/>
+          <p:nvPr/>
+        </p:nvSpPr>
+        <p:spPr>
+          <a:xfrm>
+            <a:off x="700000" y="920000"/>
+            <a:ext cx="11000000" cy="350000"/>
+          </a:xfrm>
+          <a:prstGeom prst="rect">
+            <a:avLst/>
+          </a:prstGeom>
+          <a:noFill/>
+        </p:spPr>
+        <p:txBody>
+          <a:bodyPr wrap="square" anchor="t">
+            <a:spAutoFit/>
+          </a:bodyPr>
+          <a:lstStyle/>
+          <a:p>
+            <a:pPr algn="l"/>
+            <a:r>
+              <a:rPr sz="1200" b="0">
+                <a:solidFill>
+                  <a:srgbClr val="666666"/>
+                </a:solidFill>
+                <a:latin typeface="Open Sans"/>
+                <a:ea typeface="Open Sans"/>
+                <a:cs typeface="Open Sans"/>
+              </a:rPr>
+              <a:t>Оказание первой помощи при травмах, ранениях и поражениях, прочих состояниях</a:t>
+            </a:r>
+          </a:p>
+        </p:txBody>
+      </p:sp>
+      <p:sp>
+        <p:nvSpPr>
+          <p:cNvPr id="6" name="Rectangle 5"/>
+          <p:cNvSpPr/>
+          <p:nvPr/>
+        </p:nvSpPr>
+        <p:spPr>
+          <a:xfrm>
+            <a:off x="0" y="2800000"/>
+            <a:ext cx="420000" cy="420000"/>
+          </a:xfrm>
+          <a:prstGeom prst="rect">
+            <a:avLst/>
+          </a:prstGeom>
+          <a:solidFill>
+            <a:srgbClr val="555555"/>
+          </a:solidFill>
+          <a:ln>
+            <a:noFill/>
+          </a:ln>
+        </p:spPr>
+        <p:style>
+          <a:lnRef idx="1">
+            <a:schemeClr val="accent1"/>
+          </a:lnRef>
+          <a:fillRef idx="3">
+            <a:schemeClr val="accent1"/>
+          </a:fillRef>
+          <a:effectRef idx="2">
+            <a:schemeClr val="accent1"/>
+          </a:effectRef>
+          <a:fontRef idx="minor">
+            <a:schemeClr val="lt1"/>
+          </a:fontRef>
+        </p:style>
+        <p:txBody>
+          <a:bodyPr rtlCol="0" anchor="ctr"/>
+          <a:lstStyle/>
+          <a:p>
+            <a:pPr algn="ctr"/>
+          </a:p>
+        </p:txBody>
+      </p:sp>
+      <p:sp>
+        <p:nvSpPr>
+          <p:cNvPr id="7" name="TextBox 6"/>
+          <p:cNvSpPr txBox="1"/>
+          <p:nvPr/>
+        </p:nvSpPr>
+        <p:spPr>
+          <a:xfrm>
+            <a:off x="0" y="2800000"/>
+            <a:ext cx="420000" cy="420000"/>
+          </a:xfrm>
+          <a:prstGeom prst="rect">
+            <a:avLst/>
+          </a:prstGeom>
+          <a:noFill/>
+        </p:spPr>
+        <p:txBody>
+          <a:bodyPr wrap="square" anchor="ctr">
+            <a:spAutoFit/>
+          </a:bodyPr>
+          <a:lstStyle/>
+          <a:p>
+            <a:pPr algn="ctr"/>
+            <a:r>
+              <a:rPr sz="1400" b="1">
+                <a:solidFill>
+                  <a:srgbClr val="FFFFFF"/>
+                </a:solidFill>
+                <a:latin typeface="Open Sans"/>
+                <a:ea typeface="Open Sans"/>
+                <a:cs typeface="Open Sans"/>
+              </a:rPr>
+              <a:t>12</a:t>
+            </a:r>
+          </a:p>
+        </p:txBody>
+      </p:sp>
+      <p:pic>
+        <p:nvPicPr>
+          <p:cNvPr id="8" name="Picture 7" descr="pamyatka-tema4-sudorogi-16x9.png"/>
+          <p:cNvPicPr>
+            <a:picLocks noChangeAspect="1"/>
+          </p:cNvPicPr>
+          <p:nvPr/>
+        </p:nvPicPr>
+        <p:blipFill>
+          <a:blip r:embed="rId2"/>
+          <a:stretch>
+            <a:fillRect/>
+          </a:stretch>
+        </p:blipFill>
+        <p:spPr>
+          <a:xfrm>
+            <a:off x="2300000" y="1400000"/>
+            <a:ext cx="7800000" cy="5200000"/>
+          </a:xfrm>
+          <a:prstGeom prst="rect">
+            <a:avLst/>
+          </a:prstGeom>
+        </p:spPr>
+      </p:pic>
+    </p:spTree>
+  </p:cSld>
+  <p:clrMapOvr>
+    <a:masterClrMapping/>
+  </p:clrMapOvr>
+</p:sld>
+</file>
+
+<file path=ppt/slides/slide13.xml><?xml version="1.0" encoding="utf-8"?>
+<p:sld xmlns:a="http://schemas.openxmlformats.org/drawingml/2006/main" xmlns:p="http://schemas.openxmlformats.org/presentationml/2006/main" xmlns:r="http://schemas.openxmlformats.org/officeDocument/2006/relationships">
+  <p:cSld>
+    <p:spTree>
+      <p:nvGrpSpPr>
+        <p:cNvPr id="1" name=""/>
+        <p:cNvGrpSpPr/>
+        <p:nvPr/>
+      </p:nvGrpSpPr>
+      <p:grpSpPr/>
+      <p:sp>
+        <p:nvSpPr>
+          <p:cNvPr id="2" name="Rectangle 1"/>
+          <p:cNvSpPr/>
+          <p:nvPr/>
+        </p:nvSpPr>
+        <p:spPr>
+          <a:xfrm>
+            <a:off x="0" y="0"/>
+            <a:ext cx="3400000" cy="6858000"/>
+          </a:xfrm>
+          <a:prstGeom prst="rect">
+            <a:avLst/>
+          </a:prstGeom>
+          <a:solidFill>
+            <a:srgbClr val="DDDDDD"/>
+          </a:solidFill>
+          <a:ln>
+            <a:noFill/>
+          </a:ln>
+        </p:spPr>
+        <p:style>
+          <a:lnRef idx="1">
+            <a:schemeClr val="accent1"/>
+          </a:lnRef>
+          <a:fillRef idx="3">
+            <a:schemeClr val="accent1"/>
+          </a:fillRef>
+          <a:effectRef idx="2">
+            <a:schemeClr val="accent1"/>
+          </a:effectRef>
+          <a:fontRef idx="minor">
+            <a:schemeClr val="lt1"/>
+          </a:fontRef>
+        </p:style>
+        <p:txBody>
+          <a:bodyPr rtlCol="0" anchor="ctr"/>
+          <a:lstStyle/>
+          <a:p>
+            <a:pPr algn="ctr"/>
+          </a:p>
+        </p:txBody>
+      </p:sp>
+      <p:sp>
+        <p:nvSpPr>
+          <p:cNvPr id="3" name="Rectangle 2"/>
+          <p:cNvSpPr/>
+          <p:nvPr/>
+        </p:nvSpPr>
+        <p:spPr>
+          <a:xfrm>
+            <a:off x="3400000" y="0"/>
+            <a:ext cx="8800000" cy="6858000"/>
+          </a:xfrm>
+          <a:prstGeom prst="rect">
+            <a:avLst/>
+          </a:prstGeom>
+          <a:solidFill>
+            <a:srgbClr val="F8F8F8"/>
+          </a:solidFill>
+          <a:ln>
+            <a:noFill/>
+          </a:ln>
+        </p:spPr>
+        <p:style>
+          <a:lnRef idx="1">
+            <a:schemeClr val="accent1"/>
+          </a:lnRef>
+          <a:fillRef idx="3">
+            <a:schemeClr val="accent1"/>
+          </a:fillRef>
+          <a:effectRef idx="2">
+            <a:schemeClr val="accent1"/>
+          </a:effectRef>
+          <a:fontRef idx="minor">
+            <a:schemeClr val="lt1"/>
+          </a:fontRef>
+        </p:style>
+        <p:txBody>
+          <a:bodyPr rtlCol="0" anchor="ctr"/>
+          <a:lstStyle/>
+          <a:p>
+            <a:pPr algn="ctr"/>
+          </a:p>
+        </p:txBody>
+      </p:sp>
+      <p:sp>
+        <p:nvSpPr>
+          <p:cNvPr id="4" name="TextBox 3"/>
+          <p:cNvSpPr txBox="1"/>
+          <p:nvPr/>
+        </p:nvSpPr>
+        <p:spPr>
+          <a:xfrm>
+            <a:off x="4000000" y="3000000"/>
+            <a:ext cx="7500000" cy="1000000"/>
+          </a:xfrm>
+          <a:prstGeom prst="rect">
+            <a:avLst/>
+          </a:prstGeom>
+          <a:noFill/>
+        </p:spPr>
+        <p:txBody>
+          <a:bodyPr wrap="square" anchor="ctr">
+            <a:spAutoFit/>
+          </a:bodyPr>
+          <a:lstStyle/>
+          <a:p>
+            <a:pPr algn="l"/>
+            <a:r>
+              <a:rPr sz="3000" b="1">
+                <a:solidFill>
+                  <a:srgbClr val="333333"/>
+                </a:solidFill>
+                <a:latin typeface="Open Sans"/>
+                <a:ea typeface="Open Sans"/>
+                <a:cs typeface="Open Sans"/>
+              </a:rPr>
+              <a:t>БЛАГОДАРИМ ЗА ВНИМАНИЕ</a:t>
+            </a:r>
+          </a:p>
+        </p:txBody>
+      </p:sp>
+      <p:sp>
+        <p:nvSpPr>
+          <p:cNvPr id="5" name="Rectangle 4"/>
+          <p:cNvSpPr/>
+          <p:nvPr/>
+        </p:nvSpPr>
+        <p:spPr>
+          <a:xfrm>
+            <a:off x="4000000" y="4100000"/>
+            <a:ext cx="4500000" cy="30000"/>
+          </a:xfrm>
+          <a:prstGeom prst="rect">
+            <a:avLst/>
+          </a:prstGeom>
+          <a:solidFill>
+            <a:srgbClr val="333333"/>
+          </a:solidFill>
+          <a:ln>
+            <a:noFill/>
+          </a:ln>
+        </p:spPr>
+        <p:style>
+          <a:lnRef idx="1">
+            <a:schemeClr val="accent1"/>
+          </a:lnRef>
+          <a:fillRef idx="3">
+            <a:schemeClr val="accent1"/>
+          </a:fillRef>
+          <a:effectRef idx="2">
+            <a:schemeClr val="accent1"/>
+          </a:effectRef>
+          <a:fontRef idx="minor">
+            <a:schemeClr val="lt1"/>
+          </a:fontRef>
+        </p:style>
+        <p:txBody>
+          <a:bodyPr rtlCol="0" anchor="ctr"/>
+          <a:lstStyle/>
+          <a:p>
+            <a:pPr algn="ctr"/>
+          </a:p>
+        </p:txBody>
+      </p:sp>
+    </p:spTree>
+  </p:cSld>
+  <p:clrMapOvr>
+    <a:masterClrMapping/>
+  </p:clrMapOvr>
+</p:sld>
+</file>
+
 <file path=ppt/slides/slide2.xml><?xml version="1.0" encoding="utf-8"?>
 <p:sld xmlns:a="http://schemas.openxmlformats.org/drawingml/2006/main" xmlns:p="http://schemas.openxmlformats.org/presentationml/2006/main" xmlns:r="http://schemas.openxmlformats.org/officeDocument/2006/relationships">
   <p:cSld>
@@ -3758,7 +5500,7 @@
                 <a:ea typeface="Open Sans"/>
                 <a:cs typeface="Open Sans"/>
               </a:rPr>
-              <a:t>Основные риски</a:t>
+              <a:t>Риски во время приступа</a:t>
             </a:r>
           </a:p>
         </p:txBody>
@@ -3920,7 +5662,7 @@
                 <a:ea typeface="Open Sans"/>
                 <a:cs typeface="Open Sans"/>
               </a:rPr>
-              <a:t>Безопасность во время приступа</a:t>
+              <a:t>Безопасность</a:t>
             </a:r>
           </a:p>
         </p:txBody>
@@ -4082,7 +5824,7 @@
                 <a:ea typeface="Open Sans"/>
                 <a:cs typeface="Open Sans"/>
               </a:rPr>
-              <a:t>Что не делать</a:t>
+              <a:t>Запрещенные действия</a:t>
             </a:r>
           </a:p>
         </p:txBody>
@@ -4406,7 +6148,7 @@
                 <a:ea typeface="Open Sans"/>
                 <a:cs typeface="Open Sans"/>
               </a:rPr>
-              <a:t>Поддержка</a:t>
+              <a:t>Поддержка и наблюдение</a:t>
             </a:r>
           </a:p>
         </p:txBody>
@@ -4504,7 +6246,7 @@
                 <a:ea typeface="Open Sans"/>
                 <a:cs typeface="Open Sans"/>
               </a:rPr>
-              <a:t>ЧЕМ ОПАСНЫ СУДОРОГИ</a:t>
+              <a:t>ГЛАВНАЯ ОПАСНОСТЬ — ВТОРИЧНАЯ ТРАВМА</a:t>
             </a:r>
           </a:p>
         </p:txBody>
@@ -4677,8 +6419,8 @@
         </p:nvSpPr>
         <p:spPr>
           <a:xfrm>
-            <a:off x="700000" y="1600000"/>
-            <a:ext cx="11000000" cy="4200000"/>
+            <a:off x="700000" y="1500000"/>
+            <a:ext cx="11000000" cy="4900000"/>
           </a:xfrm>
           <a:prstGeom prst="rect">
             <a:avLst/>
@@ -4693,7 +6435,7 @@
           <a:p>
             <a:pPr algn="l"/>
             <a:r>
-              <a:rPr sz="1600" b="0">
+              <a:rPr sz="1500" b="0">
                 <a:solidFill>
                   <a:srgbClr val="333333"/>
                 </a:solidFill>
@@ -4701,7 +6443,7 @@
                 <a:ea typeface="Open Sans"/>
                 <a:cs typeface="Open Sans"/>
               </a:rPr>
-              <a:t>Во время приступа человек может получить травму. После судорог возможно нарушение проходимости дыхательных путей, поэтому особенно важны безопасность и контроль дыхания.</a:t>
+              <a:t>Во время непроизвольных судорожных движений человек может удариться о твердые предметы, получить рану, ожог или упасть с высоты. После приступа возможны нарушение сознания, западение языка и попадание крови или рвотных масс в дыхательные пути.</a:t>
             </a:r>
           </a:p>
         </p:txBody>
@@ -4799,7 +6541,7 @@
                 <a:ea typeface="Open Sans"/>
                 <a:cs typeface="Open Sans"/>
               </a:rPr>
-              <a:t>ВО ВРЕМЯ ПРИСТУПА</a:t>
+              <a:t>ОСВОБОДИТЕ ПРОСТРАНСТВО</a:t>
             </a:r>
           </a:p>
         </p:txBody>
@@ -4972,8 +6714,8 @@
         </p:nvSpPr>
         <p:spPr>
           <a:xfrm>
-            <a:off x="700000" y="1450000"/>
-            <a:ext cx="550000" cy="550000"/>
+            <a:off x="700000" y="1400000"/>
+            <a:ext cx="500000" cy="500000"/>
           </a:xfrm>
           <a:prstGeom prst="ellipse">
             <a:avLst/>
@@ -5015,8 +6757,8 @@
         </p:nvSpPr>
         <p:spPr>
           <a:xfrm>
-            <a:off x="700000" y="1450000"/>
-            <a:ext cx="550000" cy="550000"/>
+            <a:off x="700000" y="1400000"/>
+            <a:ext cx="500000" cy="500000"/>
           </a:xfrm>
           <a:prstGeom prst="rect">
             <a:avLst/>
@@ -5031,7 +6773,7 @@
           <a:p>
             <a:pPr algn="ctr"/>
             <a:r>
-              <a:rPr sz="1400" b="1">
+              <a:rPr sz="1300" b="1">
                 <a:solidFill>
                   <a:srgbClr val="FFFFFF"/>
                 </a:solidFill>
@@ -5052,8 +6794,8 @@
         </p:nvSpPr>
         <p:spPr>
           <a:xfrm>
-            <a:off x="1450000" y="1450000"/>
-            <a:ext cx="10500000" cy="550000"/>
+            <a:off x="1400000" y="1400000"/>
+            <a:ext cx="10550000" cy="620000"/>
           </a:xfrm>
           <a:prstGeom prst="rect">
             <a:avLst/>
@@ -5097,8 +6839,8 @@
         </p:nvSpPr>
         <p:spPr>
           <a:xfrm>
-            <a:off x="1650000" y="1450000"/>
-            <a:ext cx="10100000" cy="550000"/>
+            <a:off x="1600000" y="1400000"/>
+            <a:ext cx="10150000" cy="620000"/>
           </a:xfrm>
           <a:prstGeom prst="rect">
             <a:avLst/>
@@ -5121,7 +6863,7 @@
                 <a:ea typeface="Open Sans"/>
                 <a:cs typeface="Open Sans"/>
               </a:rPr>
-              <a:t>Уберите острые, твердые и горячие предметы.</a:t>
+              <a:t>Сохраняйте спокойствие и отметьте время начала судорог.</a:t>
             </a:r>
           </a:p>
         </p:txBody>
@@ -5134,8 +6876,8 @@
         </p:nvSpPr>
         <p:spPr>
           <a:xfrm>
-            <a:off x="700000" y="2320000"/>
-            <a:ext cx="550000" cy="550000"/>
+            <a:off x="700000" y="2100000"/>
+            <a:ext cx="500000" cy="500000"/>
           </a:xfrm>
           <a:prstGeom prst="ellipse">
             <a:avLst/>
@@ -5177,8 +6919,8 @@
         </p:nvSpPr>
         <p:spPr>
           <a:xfrm>
-            <a:off x="700000" y="2320000"/>
-            <a:ext cx="550000" cy="550000"/>
+            <a:off x="700000" y="2100000"/>
+            <a:ext cx="500000" cy="500000"/>
           </a:xfrm>
           <a:prstGeom prst="rect">
             <a:avLst/>
@@ -5193,7 +6935,7 @@
           <a:p>
             <a:pPr algn="ctr"/>
             <a:r>
-              <a:rPr sz="1400" b="1">
+              <a:rPr sz="1300" b="1">
                 <a:solidFill>
                   <a:srgbClr val="FFFFFF"/>
                 </a:solidFill>
@@ -5214,8 +6956,8 @@
         </p:nvSpPr>
         <p:spPr>
           <a:xfrm>
-            <a:off x="1450000" y="2320000"/>
-            <a:ext cx="10500000" cy="550000"/>
+            <a:off x="1400000" y="2100000"/>
+            <a:ext cx="10550000" cy="620000"/>
           </a:xfrm>
           <a:prstGeom prst="rect">
             <a:avLst/>
@@ -5259,8 +7001,8 @@
         </p:nvSpPr>
         <p:spPr>
           <a:xfrm>
-            <a:off x="1650000" y="2320000"/>
-            <a:ext cx="10100000" cy="550000"/>
+            <a:off x="1600000" y="2100000"/>
+            <a:ext cx="10150000" cy="620000"/>
           </a:xfrm>
           <a:prstGeom prst="rect">
             <a:avLst/>
@@ -5283,7 +7025,7 @@
                 <a:ea typeface="Open Sans"/>
                 <a:cs typeface="Open Sans"/>
               </a:rPr>
-              <a:t>Защитите голову мягким предметом.</a:t>
+              <a:t>Уберите острые, стеклянные, горячие и тяжелые предметы.</a:t>
             </a:r>
           </a:p>
         </p:txBody>
@@ -5296,8 +7038,8 @@
         </p:nvSpPr>
         <p:spPr>
           <a:xfrm>
-            <a:off x="700000" y="3190000"/>
-            <a:ext cx="550000" cy="550000"/>
+            <a:off x="700000" y="2800000"/>
+            <a:ext cx="500000" cy="500000"/>
           </a:xfrm>
           <a:prstGeom prst="ellipse">
             <a:avLst/>
@@ -5339,8 +7081,8 @@
         </p:nvSpPr>
         <p:spPr>
           <a:xfrm>
-            <a:off x="700000" y="3190000"/>
-            <a:ext cx="550000" cy="550000"/>
+            <a:off x="700000" y="2800000"/>
+            <a:ext cx="500000" cy="500000"/>
           </a:xfrm>
           <a:prstGeom prst="rect">
             <a:avLst/>
@@ -5355,7 +7097,7 @@
           <a:p>
             <a:pPr algn="ctr"/>
             <a:r>
-              <a:rPr sz="1400" b="1">
+              <a:rPr sz="1300" b="1">
                 <a:solidFill>
                   <a:srgbClr val="FFFFFF"/>
                 </a:solidFill>
@@ -5376,8 +7118,8 @@
         </p:nvSpPr>
         <p:spPr>
           <a:xfrm>
-            <a:off x="1450000" y="3190000"/>
-            <a:ext cx="10500000" cy="550000"/>
+            <a:off x="1400000" y="2800000"/>
+            <a:ext cx="10550000" cy="620000"/>
           </a:xfrm>
           <a:prstGeom prst="rect">
             <a:avLst/>
@@ -5421,8 +7163,8 @@
         </p:nvSpPr>
         <p:spPr>
           <a:xfrm>
-            <a:off x="1650000" y="3190000"/>
-            <a:ext cx="10100000" cy="550000"/>
+            <a:off x="1600000" y="2800000"/>
+            <a:ext cx="10150000" cy="620000"/>
           </a:xfrm>
           <a:prstGeom prst="rect">
             <a:avLst/>
@@ -5445,7 +7187,7 @@
                 <a:ea typeface="Open Sans"/>
                 <a:cs typeface="Open Sans"/>
               </a:rPr>
-              <a:t>Освободите пространство вокруг пострадавшего.</a:t>
+              <a:t>Отодвиньте мебель и предупредите окружающих.</a:t>
             </a:r>
           </a:p>
         </p:txBody>
@@ -5458,8 +7200,8 @@
         </p:nvSpPr>
         <p:spPr>
           <a:xfrm>
-            <a:off x="700000" y="4060000"/>
-            <a:ext cx="550000" cy="550000"/>
+            <a:off x="700000" y="3500000"/>
+            <a:ext cx="500000" cy="500000"/>
           </a:xfrm>
           <a:prstGeom prst="ellipse">
             <a:avLst/>
@@ -5501,8 +7243,8 @@
         </p:nvSpPr>
         <p:spPr>
           <a:xfrm>
-            <a:off x="700000" y="4060000"/>
-            <a:ext cx="550000" cy="550000"/>
+            <a:off x="700000" y="3500000"/>
+            <a:ext cx="500000" cy="500000"/>
           </a:xfrm>
           <a:prstGeom prst="rect">
             <a:avLst/>
@@ -5517,7 +7259,7 @@
           <a:p>
             <a:pPr algn="ctr"/>
             <a:r>
-              <a:rPr sz="1400" b="1">
+              <a:rPr sz="1300" b="1">
                 <a:solidFill>
                   <a:srgbClr val="FFFFFF"/>
                 </a:solidFill>
@@ -5538,8 +7280,8 @@
         </p:nvSpPr>
         <p:spPr>
           <a:xfrm>
-            <a:off x="1450000" y="4060000"/>
-            <a:ext cx="10500000" cy="550000"/>
+            <a:off x="1400000" y="3500000"/>
+            <a:ext cx="10550000" cy="620000"/>
           </a:xfrm>
           <a:prstGeom prst="rect">
             <a:avLst/>
@@ -5583,8 +7325,8 @@
         </p:nvSpPr>
         <p:spPr>
           <a:xfrm>
-            <a:off x="1650000" y="4060000"/>
-            <a:ext cx="10100000" cy="550000"/>
+            <a:off x="1600000" y="3500000"/>
+            <a:ext cx="10150000" cy="620000"/>
           </a:xfrm>
           <a:prstGeom prst="rect">
             <a:avLst/>
@@ -5607,7 +7349,7 @@
                 <a:ea typeface="Open Sans"/>
                 <a:cs typeface="Open Sans"/>
               </a:rPr>
-              <a:t>Не пытайтесь насильно остановить судороги.</a:t>
+              <a:t>Защитите человека от дороги, воды, огня, лестницы и высоты.</a:t>
             </a:r>
           </a:p>
         </p:txBody>
@@ -5620,8 +7362,8 @@
         </p:nvSpPr>
         <p:spPr>
           <a:xfrm>
-            <a:off x="700000" y="4930000"/>
-            <a:ext cx="550000" cy="550000"/>
+            <a:off x="700000" y="4200000"/>
+            <a:ext cx="500000" cy="500000"/>
           </a:xfrm>
           <a:prstGeom prst="ellipse">
             <a:avLst/>
@@ -5663,8 +7405,8 @@
         </p:nvSpPr>
         <p:spPr>
           <a:xfrm>
-            <a:off x="700000" y="4930000"/>
-            <a:ext cx="550000" cy="550000"/>
+            <a:off x="700000" y="4200000"/>
+            <a:ext cx="500000" cy="500000"/>
           </a:xfrm>
           <a:prstGeom prst="rect">
             <a:avLst/>
@@ -5679,7 +7421,7 @@
           <a:p>
             <a:pPr algn="ctr"/>
             <a:r>
-              <a:rPr sz="1400" b="1">
+              <a:rPr sz="1300" b="1">
                 <a:solidFill>
                   <a:srgbClr val="FFFFFF"/>
                 </a:solidFill>
@@ -5700,8 +7442,8 @@
         </p:nvSpPr>
         <p:spPr>
           <a:xfrm>
-            <a:off x="1450000" y="4930000"/>
-            <a:ext cx="10500000" cy="550000"/>
+            <a:off x="1400000" y="4200000"/>
+            <a:ext cx="10550000" cy="620000"/>
           </a:xfrm>
           <a:prstGeom prst="rect">
             <a:avLst/>
@@ -5745,8 +7487,8 @@
         </p:nvSpPr>
         <p:spPr>
           <a:xfrm>
-            <a:off x="1650000" y="4930000"/>
-            <a:ext cx="10100000" cy="550000"/>
+            <a:off x="1600000" y="4200000"/>
+            <a:ext cx="10150000" cy="620000"/>
           </a:xfrm>
           <a:prstGeom prst="rect">
             <a:avLst/>
@@ -5769,7 +7511,249 @@
                 <a:ea typeface="Open Sans"/>
                 <a:cs typeface="Open Sans"/>
               </a:rPr>
-              <a:t>Отметьте время начала приступа.</a:t>
+              <a:t>Подложите под голову мягкую сложенную одежду.</a:t>
+            </a:r>
+          </a:p>
+        </p:txBody>
+      </p:sp>
+      <p:sp>
+        <p:nvSpPr>
+          <p:cNvPr id="28" name="Oval 27"/>
+          <p:cNvSpPr/>
+          <p:nvPr/>
+        </p:nvSpPr>
+        <p:spPr>
+          <a:xfrm>
+            <a:off x="700000" y="4900000"/>
+            <a:ext cx="500000" cy="500000"/>
+          </a:xfrm>
+          <a:prstGeom prst="ellipse">
+            <a:avLst/>
+          </a:prstGeom>
+          <a:solidFill>
+            <a:srgbClr val="555555"/>
+          </a:solidFill>
+          <a:ln>
+            <a:noFill/>
+          </a:ln>
+        </p:spPr>
+        <p:style>
+          <a:lnRef idx="1">
+            <a:schemeClr val="accent1"/>
+          </a:lnRef>
+          <a:fillRef idx="3">
+            <a:schemeClr val="accent1"/>
+          </a:fillRef>
+          <a:effectRef idx="2">
+            <a:schemeClr val="accent1"/>
+          </a:effectRef>
+          <a:fontRef idx="minor">
+            <a:schemeClr val="lt1"/>
+          </a:fontRef>
+        </p:style>
+        <p:txBody>
+          <a:bodyPr rtlCol="0" anchor="ctr"/>
+          <a:lstStyle/>
+          <a:p>
+            <a:pPr algn="ctr"/>
+          </a:p>
+        </p:txBody>
+      </p:sp>
+      <p:sp>
+        <p:nvSpPr>
+          <p:cNvPr id="29" name="TextBox 28"/>
+          <p:cNvSpPr txBox="1"/>
+          <p:nvPr/>
+        </p:nvSpPr>
+        <p:spPr>
+          <a:xfrm>
+            <a:off x="700000" y="4900000"/>
+            <a:ext cx="500000" cy="500000"/>
+          </a:xfrm>
+          <a:prstGeom prst="rect">
+            <a:avLst/>
+          </a:prstGeom>
+          <a:noFill/>
+        </p:spPr>
+        <p:txBody>
+          <a:bodyPr wrap="square" anchor="ctr">
+            <a:spAutoFit/>
+          </a:bodyPr>
+          <a:lstStyle/>
+          <a:p>
+            <a:pPr algn="ctr"/>
+            <a:r>
+              <a:rPr sz="1300" b="1">
+                <a:solidFill>
+                  <a:srgbClr val="FFFFFF"/>
+                </a:solidFill>
+                <a:latin typeface="Open Sans"/>
+                <a:ea typeface="Open Sans"/>
+                <a:cs typeface="Open Sans"/>
+              </a:rPr>
+              <a:t>6</a:t>
+            </a:r>
+          </a:p>
+        </p:txBody>
+      </p:sp>
+      <p:sp>
+        <p:nvSpPr>
+          <p:cNvPr id="30" name="Rectangle 29"/>
+          <p:cNvSpPr/>
+          <p:nvPr/>
+        </p:nvSpPr>
+        <p:spPr>
+          <a:xfrm>
+            <a:off x="1400000" y="4900000"/>
+            <a:ext cx="10550000" cy="620000"/>
+          </a:xfrm>
+          <a:prstGeom prst="rect">
+            <a:avLst/>
+          </a:prstGeom>
+          <a:solidFill>
+            <a:srgbClr val="FFFFFF"/>
+          </a:solidFill>
+          <a:ln w="12700">
+            <a:solidFill>
+              <a:srgbClr val="999999"/>
+            </a:solidFill>
+          </a:ln>
+        </p:spPr>
+        <p:style>
+          <a:lnRef idx="1">
+            <a:schemeClr val="accent1"/>
+          </a:lnRef>
+          <a:fillRef idx="3">
+            <a:schemeClr val="accent1"/>
+          </a:fillRef>
+          <a:effectRef idx="2">
+            <a:schemeClr val="accent1"/>
+          </a:effectRef>
+          <a:fontRef idx="minor">
+            <a:schemeClr val="lt1"/>
+          </a:fontRef>
+        </p:style>
+        <p:txBody>
+          <a:bodyPr rtlCol="0" anchor="ctr"/>
+          <a:lstStyle/>
+          <a:p>
+            <a:pPr algn="ctr"/>
+          </a:p>
+        </p:txBody>
+      </p:sp>
+      <p:sp>
+        <p:nvSpPr>
+          <p:cNvPr id="31" name="TextBox 30"/>
+          <p:cNvSpPr txBox="1"/>
+          <p:nvPr/>
+        </p:nvSpPr>
+        <p:spPr>
+          <a:xfrm>
+            <a:off x="1600000" y="4900000"/>
+            <a:ext cx="10150000" cy="620000"/>
+          </a:xfrm>
+          <a:prstGeom prst="rect">
+            <a:avLst/>
+          </a:prstGeom>
+          <a:noFill/>
+        </p:spPr>
+        <p:txBody>
+          <a:bodyPr wrap="square" anchor="ctr">
+            <a:spAutoFit/>
+          </a:bodyPr>
+          <a:lstStyle/>
+          <a:p>
+            <a:pPr algn="l"/>
+            <a:r>
+              <a:rPr sz="1300" b="0">
+                <a:solidFill>
+                  <a:srgbClr val="333333"/>
+                </a:solidFill>
+                <a:latin typeface="Open Sans"/>
+                <a:ea typeface="Open Sans"/>
+                <a:cs typeface="Open Sans"/>
+              </a:rPr>
+              <a:t>Ослабьте тесную одежду вокруг шеи, не мешая движениям.</a:t>
+            </a:r>
+          </a:p>
+        </p:txBody>
+      </p:sp>
+      <p:sp>
+        <p:nvSpPr>
+          <p:cNvPr id="32" name="Rounded Rectangle 31"/>
+          <p:cNvSpPr/>
+          <p:nvPr/>
+        </p:nvSpPr>
+        <p:spPr>
+          <a:xfrm>
+            <a:off x="700000" y="5800000"/>
+            <a:ext cx="11000000" cy="900000"/>
+          </a:xfrm>
+          <a:prstGeom prst="roundRect">
+            <a:avLst/>
+          </a:prstGeom>
+          <a:solidFill>
+            <a:srgbClr val="F5F0E1"/>
+          </a:solidFill>
+          <a:ln>
+            <a:noFill/>
+          </a:ln>
+        </p:spPr>
+        <p:style>
+          <a:lnRef idx="1">
+            <a:schemeClr val="accent1"/>
+          </a:lnRef>
+          <a:fillRef idx="3">
+            <a:schemeClr val="accent1"/>
+          </a:fillRef>
+          <a:effectRef idx="2">
+            <a:schemeClr val="accent1"/>
+          </a:effectRef>
+          <a:fontRef idx="minor">
+            <a:schemeClr val="lt1"/>
+          </a:fontRef>
+        </p:style>
+        <p:txBody>
+          <a:bodyPr rtlCol="0" anchor="ctr"/>
+          <a:lstStyle/>
+          <a:p>
+            <a:pPr algn="ctr"/>
+          </a:p>
+        </p:txBody>
+      </p:sp>
+      <p:sp>
+        <p:nvSpPr>
+          <p:cNvPr id="33" name="TextBox 32"/>
+          <p:cNvSpPr txBox="1"/>
+          <p:nvPr/>
+        </p:nvSpPr>
+        <p:spPr>
+          <a:xfrm>
+            <a:off x="950000" y="6000000"/>
+            <a:ext cx="10500000" cy="500000"/>
+          </a:xfrm>
+          <a:prstGeom prst="rect">
+            <a:avLst/>
+          </a:prstGeom>
+          <a:noFill/>
+        </p:spPr>
+        <p:txBody>
+          <a:bodyPr wrap="square" anchor="ctr">
+            <a:spAutoFit/>
+          </a:bodyPr>
+          <a:lstStyle/>
+          <a:p>
+            <a:pPr algn="l"/>
+            <a:r>
+              <a:rPr sz="1200" b="0">
+                <a:solidFill>
+                  <a:srgbClr val="333333"/>
+                </a:solidFill>
+                <a:latin typeface="Open Sans"/>
+                <a:ea typeface="Open Sans"/>
+                <a:cs typeface="Open Sans"/>
+              </a:rPr>
+              <a:t>Перемещайте человека во время приступа только из зоны непосредственной опасности.</a:t>
             </a:r>
           </a:p>
         </p:txBody>
@@ -5867,7 +7851,7 @@
                 <a:ea typeface="Open Sans"/>
                 <a:cs typeface="Open Sans"/>
               </a:rPr>
-              <a:t>НЕ ПРИЧИНЯЙТЕ ДОПОЛНИТЕЛЬНЫЙ ВРЕД</a:t>
+              <a:t>ВО ВРЕМЯ ПРИСТУПА</a:t>
             </a:r>
           </a:p>
         </p:txBody>
@@ -6040,8 +8024,8 @@
         </p:nvSpPr>
         <p:spPr>
           <a:xfrm>
-            <a:off x="700000" y="1500000"/>
-            <a:ext cx="11000000" cy="4200000"/>
+            <a:off x="700000" y="1450000"/>
+            <a:ext cx="11000000" cy="4000000"/>
           </a:xfrm>
           <a:prstGeom prst="rect">
             <a:avLst/>
@@ -6060,15 +8044,15 @@
               </a:spcAft>
             </a:pPr>
             <a:r>
-              <a:rPr sz="1400" b="1">
-                <a:solidFill>
-                  <a:srgbClr val="CC0000"/>
+              <a:rPr sz="1400" b="0">
+                <a:solidFill>
+                  <a:srgbClr val="333333"/>
                 </a:solidFill>
                 <a:latin typeface="Open Sans"/>
                 <a:ea typeface="Open Sans"/>
                 <a:cs typeface="Open Sans"/>
               </a:rPr>
-              <a:t>•  Не удерживайте руки и ноги силой</a:t>
+              <a:t>•  Оставайтесь рядом и наблюдайте за характером судорог.</a:t>
             </a:r>
           </a:p>
           <a:p>
@@ -6078,15 +8062,15 @@
               </a:spcAft>
             </a:pPr>
             <a:r>
-              <a:rPr sz="1400" b="1">
-                <a:solidFill>
-                  <a:srgbClr val="CC0000"/>
+              <a:rPr sz="1400" b="0">
+                <a:solidFill>
+                  <a:srgbClr val="333333"/>
                 </a:solidFill>
                 <a:latin typeface="Open Sans"/>
                 <a:ea typeface="Open Sans"/>
                 <a:cs typeface="Open Sans"/>
               </a:rPr>
-              <a:t>•  Не разжимайте зубы</a:t>
+              <a:t>•  Не препятствуйте свободным движениям грудной клетки.</a:t>
             </a:r>
           </a:p>
           <a:p>
@@ -6096,15 +8080,15 @@
               </a:spcAft>
             </a:pPr>
             <a:r>
-              <a:rPr sz="1400" b="1">
-                <a:solidFill>
-                  <a:srgbClr val="CC0000"/>
+              <a:rPr sz="1400" b="0">
+                <a:solidFill>
+                  <a:srgbClr val="333333"/>
                 </a:solidFill>
                 <a:latin typeface="Open Sans"/>
                 <a:ea typeface="Open Sans"/>
                 <a:cs typeface="Open Sans"/>
               </a:rPr>
-              <a:t>•  Не кладите предметы в рот</a:t>
+              <a:t>•  Не пытайтесь открыть рот или вытянуть язык.</a:t>
             </a:r>
           </a:p>
           <a:p>
@@ -6114,15 +8098,51 @@
               </a:spcAft>
             </a:pPr>
             <a:r>
-              <a:rPr sz="1400" b="1">
-                <a:solidFill>
-                  <a:srgbClr val="CC0000"/>
+              <a:rPr sz="1400" b="0">
+                <a:solidFill>
+                  <a:srgbClr val="333333"/>
                 </a:solidFill>
                 <a:latin typeface="Open Sans"/>
                 <a:ea typeface="Open Sans"/>
                 <a:cs typeface="Open Sans"/>
               </a:rPr>
-              <a:t>•  Не давайте воду или лекарства во время судорог</a:t>
+              <a:t>•  Не давайте воду, пищу или лекарство.</a:t>
+            </a:r>
+          </a:p>
+          <a:p>
+            <a:pPr algn="l">
+              <a:spcAft>
+                <a:spcPts val="800"/>
+              </a:spcAft>
+            </a:pPr>
+            <a:r>
+              <a:rPr sz="1400" b="0">
+                <a:solidFill>
+                  <a:srgbClr val="333333"/>
+                </a:solidFill>
+                <a:latin typeface="Open Sans"/>
+                <a:ea typeface="Open Sans"/>
+                <a:cs typeface="Open Sans"/>
+              </a:rPr>
+              <a:t>•  Следите за продолжительностью и повторением приступов.</a:t>
+            </a:r>
+          </a:p>
+          <a:p>
+            <a:pPr algn="l">
+              <a:spcAft>
+                <a:spcPts val="800"/>
+              </a:spcAft>
+            </a:pPr>
+            <a:r>
+              <a:rPr sz="1400" b="0">
+                <a:solidFill>
+                  <a:srgbClr val="333333"/>
+                </a:solidFill>
+                <a:latin typeface="Open Sans"/>
+                <a:ea typeface="Open Sans"/>
+                <a:cs typeface="Open Sans"/>
+              </a:rPr>
+              <a:t>•  Подготовьтесь после прекращения судорог оценить дыхание.</a:t>
             </a:r>
           </a:p>
         </p:txBody>
@@ -6220,7 +8240,7 @@
                 <a:ea typeface="Open Sans"/>
                 <a:cs typeface="Open Sans"/>
               </a:rPr>
-              <a:t>ПОСЛЕ ОКОНЧАНИЯ СУДОРОГ</a:t>
+              <a:t>ЗАПРЕЩЕННЫЕ ДЕЙСТВИЯ</a:t>
             </a:r>
           </a:p>
         </p:txBody>
@@ -6387,20 +8407,133 @@
       </p:sp>
       <p:sp>
         <p:nvSpPr>
-          <p:cNvPr id="8" name="Oval 7"/>
+          <p:cNvPr id="8" name="TextBox 7"/>
+          <p:cNvSpPr txBox="1"/>
+          <p:nvPr/>
+        </p:nvSpPr>
+        <p:spPr>
+          <a:xfrm>
+            <a:off x="700000" y="1450000"/>
+            <a:ext cx="11000000" cy="4000000"/>
+          </a:xfrm>
+          <a:prstGeom prst="rect">
+            <a:avLst/>
+          </a:prstGeom>
+          <a:noFill/>
+        </p:spPr>
+        <p:txBody>
+          <a:bodyPr wrap="square">
+            <a:spAutoFit/>
+          </a:bodyPr>
+          <a:lstStyle/>
+          <a:p>
+            <a:pPr algn="l">
+              <a:spcAft>
+                <a:spcPts val="800"/>
+              </a:spcAft>
+            </a:pPr>
+            <a:r>
+              <a:rPr sz="1400" b="1">
+                <a:solidFill>
+                  <a:srgbClr val="CC0000"/>
+                </a:solidFill>
+                <a:latin typeface="Open Sans"/>
+                <a:ea typeface="Open Sans"/>
+                <a:cs typeface="Open Sans"/>
+              </a:rPr>
+              <a:t>•  Удерживать руки, ноги или туловище силой</a:t>
+            </a:r>
+          </a:p>
+          <a:p>
+            <a:pPr algn="l">
+              <a:spcAft>
+                <a:spcPts val="800"/>
+              </a:spcAft>
+            </a:pPr>
+            <a:r>
+              <a:rPr sz="1400" b="1">
+                <a:solidFill>
+                  <a:srgbClr val="CC0000"/>
+                </a:solidFill>
+                <a:latin typeface="Open Sans"/>
+                <a:ea typeface="Open Sans"/>
+                <a:cs typeface="Open Sans"/>
+              </a:rPr>
+              <a:t>•  Разжимать зубы ложкой, пальцами или другим предметом</a:t>
+            </a:r>
+          </a:p>
+          <a:p>
+            <a:pPr algn="l">
+              <a:spcAft>
+                <a:spcPts val="800"/>
+              </a:spcAft>
+            </a:pPr>
+            <a:r>
+              <a:rPr sz="1400" b="1">
+                <a:solidFill>
+                  <a:srgbClr val="CC0000"/>
+                </a:solidFill>
+                <a:latin typeface="Open Sans"/>
+                <a:ea typeface="Open Sans"/>
+                <a:cs typeface="Open Sans"/>
+              </a:rPr>
+              <a:t>•  Класть что-либо в рот для «защиты языка»</a:t>
+            </a:r>
+          </a:p>
+          <a:p>
+            <a:pPr algn="l">
+              <a:spcAft>
+                <a:spcPts val="800"/>
+              </a:spcAft>
+            </a:pPr>
+            <a:r>
+              <a:rPr sz="1400" b="1">
+                <a:solidFill>
+                  <a:srgbClr val="CC0000"/>
+                </a:solidFill>
+                <a:latin typeface="Open Sans"/>
+                <a:ea typeface="Open Sans"/>
+                <a:cs typeface="Open Sans"/>
+              </a:rPr>
+              <a:t>•  Пытаться напоить или дать таблетку во время судорог</a:t>
+            </a:r>
+          </a:p>
+          <a:p>
+            <a:pPr algn="l">
+              <a:spcAft>
+                <a:spcPts val="800"/>
+              </a:spcAft>
+            </a:pPr>
+            <a:r>
+              <a:rPr sz="1400" b="1">
+                <a:solidFill>
+                  <a:srgbClr val="CC0000"/>
+                </a:solidFill>
+                <a:latin typeface="Open Sans"/>
+                <a:ea typeface="Open Sans"/>
+                <a:cs typeface="Open Sans"/>
+              </a:rPr>
+              <a:t>•  Оставлять человека одного сразу после приступа</a:t>
+            </a:r>
+          </a:p>
+        </p:txBody>
+      </p:sp>
+      <p:sp>
+        <p:nvSpPr>
+          <p:cNvPr id="9" name="Rounded Rectangle 8"/>
           <p:cNvSpPr/>
           <p:nvPr/>
         </p:nvSpPr>
         <p:spPr>
           <a:xfrm>
-            <a:off x="700000" y="1450000"/>
-            <a:ext cx="550000" cy="550000"/>
-          </a:xfrm>
-          <a:prstGeom prst="ellipse">
+            <a:off x="700000" y="5600000"/>
+            <a:ext cx="11000000" cy="1000000"/>
+          </a:xfrm>
+          <a:prstGeom prst="roundRect">
             <a:avLst/>
           </a:prstGeom>
           <a:solidFill>
-            <a:srgbClr val="CC0000"/>
+            <a:srgbClr val="F5F0E1"/>
           </a:solidFill>
           <a:ln>
             <a:noFill/>
@@ -6430,14 +8563,14 @@
       </p:sp>
       <p:sp>
         <p:nvSpPr>
-          <p:cNvPr id="9" name="TextBox 8"/>
+          <p:cNvPr id="10" name="TextBox 9"/>
           <p:cNvSpPr txBox="1"/>
           <p:nvPr/>
         </p:nvSpPr>
         <p:spPr>
           <a:xfrm>
-            <a:off x="700000" y="1450000"/>
-            <a:ext cx="550000" cy="550000"/>
+            <a:off x="950000" y="5800000"/>
+            <a:ext cx="10500000" cy="600000"/>
           </a:xfrm>
           <a:prstGeom prst="rect">
             <a:avLst/>
@@ -6450,747 +8583,17 @@
           </a:bodyPr>
           <a:lstStyle/>
           <a:p>
-            <a:pPr algn="ctr"/>
-            <a:r>
-              <a:rPr sz="1400" b="1">
-                <a:solidFill>
-                  <a:srgbClr val="FFFFFF"/>
+            <a:pPr algn="l"/>
+            <a:r>
+              <a:rPr sz="1200" b="0">
+                <a:solidFill>
+                  <a:srgbClr val="333333"/>
                 </a:solidFill>
                 <a:latin typeface="Open Sans"/>
                 <a:ea typeface="Open Sans"/>
                 <a:cs typeface="Open Sans"/>
               </a:rPr>
-              <a:t>1</a:t>
-            </a:r>
-          </a:p>
-        </p:txBody>
-      </p:sp>
-      <p:sp>
-        <p:nvSpPr>
-          <p:cNvPr id="10" name="Rectangle 9"/>
-          <p:cNvSpPr/>
-          <p:nvPr/>
-        </p:nvSpPr>
-        <p:spPr>
-          <a:xfrm>
-            <a:off x="1450000" y="1450000"/>
-            <a:ext cx="10500000" cy="550000"/>
-          </a:xfrm>
-          <a:prstGeom prst="rect">
-            <a:avLst/>
-          </a:prstGeom>
-          <a:solidFill>
-            <a:srgbClr val="FFFFFF"/>
-          </a:solidFill>
-          <a:ln w="12700">
-            <a:solidFill>
-              <a:srgbClr val="999999"/>
-            </a:solidFill>
-          </a:ln>
-        </p:spPr>
-        <p:style>
-          <a:lnRef idx="1">
-            <a:schemeClr val="accent1"/>
-          </a:lnRef>
-          <a:fillRef idx="3">
-            <a:schemeClr val="accent1"/>
-          </a:fillRef>
-          <a:effectRef idx="2">
-            <a:schemeClr val="accent1"/>
-          </a:effectRef>
-          <a:fontRef idx="minor">
-            <a:schemeClr val="lt1"/>
-          </a:fontRef>
-        </p:style>
-        <p:txBody>
-          <a:bodyPr rtlCol="0" anchor="ctr"/>
-          <a:lstStyle/>
-          <a:p>
-            <a:pPr algn="ctr"/>
-          </a:p>
-        </p:txBody>
-      </p:sp>
-      <p:sp>
-        <p:nvSpPr>
-          <p:cNvPr id="11" name="TextBox 10"/>
-          <p:cNvSpPr txBox="1"/>
-          <p:nvPr/>
-        </p:nvSpPr>
-        <p:spPr>
-          <a:xfrm>
-            <a:off x="1650000" y="1450000"/>
-            <a:ext cx="10100000" cy="550000"/>
-          </a:xfrm>
-          <a:prstGeom prst="rect">
-            <a:avLst/>
-          </a:prstGeom>
-          <a:noFill/>
-        </p:spPr>
-        <p:txBody>
-          <a:bodyPr wrap="square" anchor="ctr">
-            <a:spAutoFit/>
-          </a:bodyPr>
-          <a:lstStyle/>
-          <a:p>
-            <a:pPr algn="l"/>
-            <a:r>
-              <a:rPr sz="1300" b="0">
-                <a:solidFill>
-                  <a:srgbClr val="333333"/>
-                </a:solidFill>
-                <a:latin typeface="Open Sans"/>
-                <a:ea typeface="Open Sans"/>
-                <a:cs typeface="Open Sans"/>
-              </a:rPr>
-              <a:t>Проверьте сознание и дыхание.</a:t>
-            </a:r>
-          </a:p>
-        </p:txBody>
-      </p:sp>
-      <p:sp>
-        <p:nvSpPr>
-          <p:cNvPr id="12" name="Oval 11"/>
-          <p:cNvSpPr/>
-          <p:nvPr/>
-        </p:nvSpPr>
-        <p:spPr>
-          <a:xfrm>
-            <a:off x="700000" y="2320000"/>
-            <a:ext cx="550000" cy="550000"/>
-          </a:xfrm>
-          <a:prstGeom prst="ellipse">
-            <a:avLst/>
-          </a:prstGeom>
-          <a:solidFill>
-            <a:srgbClr val="555555"/>
-          </a:solidFill>
-          <a:ln>
-            <a:noFill/>
-          </a:ln>
-        </p:spPr>
-        <p:style>
-          <a:lnRef idx="1">
-            <a:schemeClr val="accent1"/>
-          </a:lnRef>
-          <a:fillRef idx="3">
-            <a:schemeClr val="accent1"/>
-          </a:fillRef>
-          <a:effectRef idx="2">
-            <a:schemeClr val="accent1"/>
-          </a:effectRef>
-          <a:fontRef idx="minor">
-            <a:schemeClr val="lt1"/>
-          </a:fontRef>
-        </p:style>
-        <p:txBody>
-          <a:bodyPr rtlCol="0" anchor="ctr"/>
-          <a:lstStyle/>
-          <a:p>
-            <a:pPr algn="ctr"/>
-          </a:p>
-        </p:txBody>
-      </p:sp>
-      <p:sp>
-        <p:nvSpPr>
-          <p:cNvPr id="13" name="TextBox 12"/>
-          <p:cNvSpPr txBox="1"/>
-          <p:nvPr/>
-        </p:nvSpPr>
-        <p:spPr>
-          <a:xfrm>
-            <a:off x="700000" y="2320000"/>
-            <a:ext cx="550000" cy="550000"/>
-          </a:xfrm>
-          <a:prstGeom prst="rect">
-            <a:avLst/>
-          </a:prstGeom>
-          <a:noFill/>
-        </p:spPr>
-        <p:txBody>
-          <a:bodyPr wrap="square" anchor="ctr">
-            <a:spAutoFit/>
-          </a:bodyPr>
-          <a:lstStyle/>
-          <a:p>
-            <a:pPr algn="ctr"/>
-            <a:r>
-              <a:rPr sz="1400" b="1">
-                <a:solidFill>
-                  <a:srgbClr val="FFFFFF"/>
-                </a:solidFill>
-                <a:latin typeface="Open Sans"/>
-                <a:ea typeface="Open Sans"/>
-                <a:cs typeface="Open Sans"/>
-              </a:rPr>
-              <a:t>2</a:t>
-            </a:r>
-          </a:p>
-        </p:txBody>
-      </p:sp>
-      <p:sp>
-        <p:nvSpPr>
-          <p:cNvPr id="14" name="Rectangle 13"/>
-          <p:cNvSpPr/>
-          <p:nvPr/>
-        </p:nvSpPr>
-        <p:spPr>
-          <a:xfrm>
-            <a:off x="1450000" y="2320000"/>
-            <a:ext cx="10500000" cy="550000"/>
-          </a:xfrm>
-          <a:prstGeom prst="rect">
-            <a:avLst/>
-          </a:prstGeom>
-          <a:solidFill>
-            <a:srgbClr val="FFFFFF"/>
-          </a:solidFill>
-          <a:ln w="12700">
-            <a:solidFill>
-              <a:srgbClr val="999999"/>
-            </a:solidFill>
-          </a:ln>
-        </p:spPr>
-        <p:style>
-          <a:lnRef idx="1">
-            <a:schemeClr val="accent1"/>
-          </a:lnRef>
-          <a:fillRef idx="3">
-            <a:schemeClr val="accent1"/>
-          </a:fillRef>
-          <a:effectRef idx="2">
-            <a:schemeClr val="accent1"/>
-          </a:effectRef>
-          <a:fontRef idx="minor">
-            <a:schemeClr val="lt1"/>
-          </a:fontRef>
-        </p:style>
-        <p:txBody>
-          <a:bodyPr rtlCol="0" anchor="ctr"/>
-          <a:lstStyle/>
-          <a:p>
-            <a:pPr algn="ctr"/>
-          </a:p>
-        </p:txBody>
-      </p:sp>
-      <p:sp>
-        <p:nvSpPr>
-          <p:cNvPr id="15" name="TextBox 14"/>
-          <p:cNvSpPr txBox="1"/>
-          <p:nvPr/>
-        </p:nvSpPr>
-        <p:spPr>
-          <a:xfrm>
-            <a:off x="1650000" y="2320000"/>
-            <a:ext cx="10100000" cy="550000"/>
-          </a:xfrm>
-          <a:prstGeom prst="rect">
-            <a:avLst/>
-          </a:prstGeom>
-          <a:noFill/>
-        </p:spPr>
-        <p:txBody>
-          <a:bodyPr wrap="square" anchor="ctr">
-            <a:spAutoFit/>
-          </a:bodyPr>
-          <a:lstStyle/>
-          <a:p>
-            <a:pPr algn="l"/>
-            <a:r>
-              <a:rPr sz="1300" b="0">
-                <a:solidFill>
-                  <a:srgbClr val="333333"/>
-                </a:solidFill>
-                <a:latin typeface="Open Sans"/>
-                <a:ea typeface="Open Sans"/>
-                <a:cs typeface="Open Sans"/>
-              </a:rPr>
-              <a:t>Осмотрите пострадавшего и остановите кровотечение.</a:t>
-            </a:r>
-          </a:p>
-        </p:txBody>
-      </p:sp>
-      <p:sp>
-        <p:nvSpPr>
-          <p:cNvPr id="16" name="Oval 15"/>
-          <p:cNvSpPr/>
-          <p:nvPr/>
-        </p:nvSpPr>
-        <p:spPr>
-          <a:xfrm>
-            <a:off x="700000" y="3190000"/>
-            <a:ext cx="550000" cy="550000"/>
-          </a:xfrm>
-          <a:prstGeom prst="ellipse">
-            <a:avLst/>
-          </a:prstGeom>
-          <a:solidFill>
-            <a:srgbClr val="555555"/>
-          </a:solidFill>
-          <a:ln>
-            <a:noFill/>
-          </a:ln>
-        </p:spPr>
-        <p:style>
-          <a:lnRef idx="1">
-            <a:schemeClr val="accent1"/>
-          </a:lnRef>
-          <a:fillRef idx="3">
-            <a:schemeClr val="accent1"/>
-          </a:fillRef>
-          <a:effectRef idx="2">
-            <a:schemeClr val="accent1"/>
-          </a:effectRef>
-          <a:fontRef idx="minor">
-            <a:schemeClr val="lt1"/>
-          </a:fontRef>
-        </p:style>
-        <p:txBody>
-          <a:bodyPr rtlCol="0" anchor="ctr"/>
-          <a:lstStyle/>
-          <a:p>
-            <a:pPr algn="ctr"/>
-          </a:p>
-        </p:txBody>
-      </p:sp>
-      <p:sp>
-        <p:nvSpPr>
-          <p:cNvPr id="17" name="TextBox 16"/>
-          <p:cNvSpPr txBox="1"/>
-          <p:nvPr/>
-        </p:nvSpPr>
-        <p:spPr>
-          <a:xfrm>
-            <a:off x="700000" y="3190000"/>
-            <a:ext cx="550000" cy="550000"/>
-          </a:xfrm>
-          <a:prstGeom prst="rect">
-            <a:avLst/>
-          </a:prstGeom>
-          <a:noFill/>
-        </p:spPr>
-        <p:txBody>
-          <a:bodyPr wrap="square" anchor="ctr">
-            <a:spAutoFit/>
-          </a:bodyPr>
-          <a:lstStyle/>
-          <a:p>
-            <a:pPr algn="ctr"/>
-            <a:r>
-              <a:rPr sz="1400" b="1">
-                <a:solidFill>
-                  <a:srgbClr val="FFFFFF"/>
-                </a:solidFill>
-                <a:latin typeface="Open Sans"/>
-                <a:ea typeface="Open Sans"/>
-                <a:cs typeface="Open Sans"/>
-              </a:rPr>
-              <a:t>3</a:t>
-            </a:r>
-          </a:p>
-        </p:txBody>
-      </p:sp>
-      <p:sp>
-        <p:nvSpPr>
-          <p:cNvPr id="18" name="Rectangle 17"/>
-          <p:cNvSpPr/>
-          <p:nvPr/>
-        </p:nvSpPr>
-        <p:spPr>
-          <a:xfrm>
-            <a:off x="1450000" y="3190000"/>
-            <a:ext cx="10500000" cy="550000"/>
-          </a:xfrm>
-          <a:prstGeom prst="rect">
-            <a:avLst/>
-          </a:prstGeom>
-          <a:solidFill>
-            <a:srgbClr val="FFFFFF"/>
-          </a:solidFill>
-          <a:ln w="12700">
-            <a:solidFill>
-              <a:srgbClr val="999999"/>
-            </a:solidFill>
-          </a:ln>
-        </p:spPr>
-        <p:style>
-          <a:lnRef idx="1">
-            <a:schemeClr val="accent1"/>
-          </a:lnRef>
-          <a:fillRef idx="3">
-            <a:schemeClr val="accent1"/>
-          </a:fillRef>
-          <a:effectRef idx="2">
-            <a:schemeClr val="accent1"/>
-          </a:effectRef>
-          <a:fontRef idx="minor">
-            <a:schemeClr val="lt1"/>
-          </a:fontRef>
-        </p:style>
-        <p:txBody>
-          <a:bodyPr rtlCol="0" anchor="ctr"/>
-          <a:lstStyle/>
-          <a:p>
-            <a:pPr algn="ctr"/>
-          </a:p>
-        </p:txBody>
-      </p:sp>
-      <p:sp>
-        <p:nvSpPr>
-          <p:cNvPr id="19" name="TextBox 18"/>
-          <p:cNvSpPr txBox="1"/>
-          <p:nvPr/>
-        </p:nvSpPr>
-        <p:spPr>
-          <a:xfrm>
-            <a:off x="1650000" y="3190000"/>
-            <a:ext cx="10100000" cy="550000"/>
-          </a:xfrm>
-          <a:prstGeom prst="rect">
-            <a:avLst/>
-          </a:prstGeom>
-          <a:noFill/>
-        </p:spPr>
-        <p:txBody>
-          <a:bodyPr wrap="square" anchor="ctr">
-            <a:spAutoFit/>
-          </a:bodyPr>
-          <a:lstStyle/>
-          <a:p>
-            <a:pPr algn="l"/>
-            <a:r>
-              <a:rPr sz="1300" b="0">
-                <a:solidFill>
-                  <a:srgbClr val="333333"/>
-                </a:solidFill>
-                <a:latin typeface="Open Sans"/>
-                <a:ea typeface="Open Sans"/>
-                <a:cs typeface="Open Sans"/>
-              </a:rPr>
-              <a:t>При сохраненном дыхании уложите в устойчивое боковое положение.</a:t>
-            </a:r>
-          </a:p>
-        </p:txBody>
-      </p:sp>
-      <p:sp>
-        <p:nvSpPr>
-          <p:cNvPr id="20" name="Oval 19"/>
-          <p:cNvSpPr/>
-          <p:nvPr/>
-        </p:nvSpPr>
-        <p:spPr>
-          <a:xfrm>
-            <a:off x="700000" y="4060000"/>
-            <a:ext cx="550000" cy="550000"/>
-          </a:xfrm>
-          <a:prstGeom prst="ellipse">
-            <a:avLst/>
-          </a:prstGeom>
-          <a:solidFill>
-            <a:srgbClr val="555555"/>
-          </a:solidFill>
-          <a:ln>
-            <a:noFill/>
-          </a:ln>
-        </p:spPr>
-        <p:style>
-          <a:lnRef idx="1">
-            <a:schemeClr val="accent1"/>
-          </a:lnRef>
-          <a:fillRef idx="3">
-            <a:schemeClr val="accent1"/>
-          </a:fillRef>
-          <a:effectRef idx="2">
-            <a:schemeClr val="accent1"/>
-          </a:effectRef>
-          <a:fontRef idx="minor">
-            <a:schemeClr val="lt1"/>
-          </a:fontRef>
-        </p:style>
-        <p:txBody>
-          <a:bodyPr rtlCol="0" anchor="ctr"/>
-          <a:lstStyle/>
-          <a:p>
-            <a:pPr algn="ctr"/>
-          </a:p>
-        </p:txBody>
-      </p:sp>
-      <p:sp>
-        <p:nvSpPr>
-          <p:cNvPr id="21" name="TextBox 20"/>
-          <p:cNvSpPr txBox="1"/>
-          <p:nvPr/>
-        </p:nvSpPr>
-        <p:spPr>
-          <a:xfrm>
-            <a:off x="700000" y="4060000"/>
-            <a:ext cx="550000" cy="550000"/>
-          </a:xfrm>
-          <a:prstGeom prst="rect">
-            <a:avLst/>
-          </a:prstGeom>
-          <a:noFill/>
-        </p:spPr>
-        <p:txBody>
-          <a:bodyPr wrap="square" anchor="ctr">
-            <a:spAutoFit/>
-          </a:bodyPr>
-          <a:lstStyle/>
-          <a:p>
-            <a:pPr algn="ctr"/>
-            <a:r>
-              <a:rPr sz="1400" b="1">
-                <a:solidFill>
-                  <a:srgbClr val="FFFFFF"/>
-                </a:solidFill>
-                <a:latin typeface="Open Sans"/>
-                <a:ea typeface="Open Sans"/>
-                <a:cs typeface="Open Sans"/>
-              </a:rPr>
-              <a:t>4</a:t>
-            </a:r>
-          </a:p>
-        </p:txBody>
-      </p:sp>
-      <p:sp>
-        <p:nvSpPr>
-          <p:cNvPr id="22" name="Rectangle 21"/>
-          <p:cNvSpPr/>
-          <p:nvPr/>
-        </p:nvSpPr>
-        <p:spPr>
-          <a:xfrm>
-            <a:off x="1450000" y="4060000"/>
-            <a:ext cx="10500000" cy="550000"/>
-          </a:xfrm>
-          <a:prstGeom prst="rect">
-            <a:avLst/>
-          </a:prstGeom>
-          <a:solidFill>
-            <a:srgbClr val="FFFFFF"/>
-          </a:solidFill>
-          <a:ln w="12700">
-            <a:solidFill>
-              <a:srgbClr val="999999"/>
-            </a:solidFill>
-          </a:ln>
-        </p:spPr>
-        <p:style>
-          <a:lnRef idx="1">
-            <a:schemeClr val="accent1"/>
-          </a:lnRef>
-          <a:fillRef idx="3">
-            <a:schemeClr val="accent1"/>
-          </a:fillRef>
-          <a:effectRef idx="2">
-            <a:schemeClr val="accent1"/>
-          </a:effectRef>
-          <a:fontRef idx="minor">
-            <a:schemeClr val="lt1"/>
-          </a:fontRef>
-        </p:style>
-        <p:txBody>
-          <a:bodyPr rtlCol="0" anchor="ctr"/>
-          <a:lstStyle/>
-          <a:p>
-            <a:pPr algn="ctr"/>
-          </a:p>
-        </p:txBody>
-      </p:sp>
-      <p:sp>
-        <p:nvSpPr>
-          <p:cNvPr id="23" name="TextBox 22"/>
-          <p:cNvSpPr txBox="1"/>
-          <p:nvPr/>
-        </p:nvSpPr>
-        <p:spPr>
-          <a:xfrm>
-            <a:off x="1650000" y="4060000"/>
-            <a:ext cx="10100000" cy="550000"/>
-          </a:xfrm>
-          <a:prstGeom prst="rect">
-            <a:avLst/>
-          </a:prstGeom>
-          <a:noFill/>
-        </p:spPr>
-        <p:txBody>
-          <a:bodyPr wrap="square" anchor="ctr">
-            <a:spAutoFit/>
-          </a:bodyPr>
-          <a:lstStyle/>
-          <a:p>
-            <a:pPr algn="l"/>
-            <a:r>
-              <a:rPr sz="1300" b="0">
-                <a:solidFill>
-                  <a:srgbClr val="333333"/>
-                </a:solidFill>
-                <a:latin typeface="Open Sans"/>
-                <a:ea typeface="Open Sans"/>
-                <a:cs typeface="Open Sans"/>
-              </a:rPr>
-              <a:t>Вызовите скорую медицинскую помощь.</a:t>
-            </a:r>
-          </a:p>
-        </p:txBody>
-      </p:sp>
-      <p:sp>
-        <p:nvSpPr>
-          <p:cNvPr id="24" name="Oval 23"/>
-          <p:cNvSpPr/>
-          <p:nvPr/>
-        </p:nvSpPr>
-        <p:spPr>
-          <a:xfrm>
-            <a:off x="700000" y="4930000"/>
-            <a:ext cx="550000" cy="550000"/>
-          </a:xfrm>
-          <a:prstGeom prst="ellipse">
-            <a:avLst/>
-          </a:prstGeom>
-          <a:solidFill>
-            <a:srgbClr val="555555"/>
-          </a:solidFill>
-          <a:ln>
-            <a:noFill/>
-          </a:ln>
-        </p:spPr>
-        <p:style>
-          <a:lnRef idx="1">
-            <a:schemeClr val="accent1"/>
-          </a:lnRef>
-          <a:fillRef idx="3">
-            <a:schemeClr val="accent1"/>
-          </a:fillRef>
-          <a:effectRef idx="2">
-            <a:schemeClr val="accent1"/>
-          </a:effectRef>
-          <a:fontRef idx="minor">
-            <a:schemeClr val="lt1"/>
-          </a:fontRef>
-        </p:style>
-        <p:txBody>
-          <a:bodyPr rtlCol="0" anchor="ctr"/>
-          <a:lstStyle/>
-          <a:p>
-            <a:pPr algn="ctr"/>
-          </a:p>
-        </p:txBody>
-      </p:sp>
-      <p:sp>
-        <p:nvSpPr>
-          <p:cNvPr id="25" name="TextBox 24"/>
-          <p:cNvSpPr txBox="1"/>
-          <p:nvPr/>
-        </p:nvSpPr>
-        <p:spPr>
-          <a:xfrm>
-            <a:off x="700000" y="4930000"/>
-            <a:ext cx="550000" cy="550000"/>
-          </a:xfrm>
-          <a:prstGeom prst="rect">
-            <a:avLst/>
-          </a:prstGeom>
-          <a:noFill/>
-        </p:spPr>
-        <p:txBody>
-          <a:bodyPr wrap="square" anchor="ctr">
-            <a:spAutoFit/>
-          </a:bodyPr>
-          <a:lstStyle/>
-          <a:p>
-            <a:pPr algn="ctr"/>
-            <a:r>
-              <a:rPr sz="1400" b="1">
-                <a:solidFill>
-                  <a:srgbClr val="FFFFFF"/>
-                </a:solidFill>
-                <a:latin typeface="Open Sans"/>
-                <a:ea typeface="Open Sans"/>
-                <a:cs typeface="Open Sans"/>
-              </a:rPr>
-              <a:t>5</a:t>
-            </a:r>
-          </a:p>
-        </p:txBody>
-      </p:sp>
-      <p:sp>
-        <p:nvSpPr>
-          <p:cNvPr id="26" name="Rectangle 25"/>
-          <p:cNvSpPr/>
-          <p:nvPr/>
-        </p:nvSpPr>
-        <p:spPr>
-          <a:xfrm>
-            <a:off x="1450000" y="4930000"/>
-            <a:ext cx="10500000" cy="550000"/>
-          </a:xfrm>
-          <a:prstGeom prst="rect">
-            <a:avLst/>
-          </a:prstGeom>
-          <a:solidFill>
-            <a:srgbClr val="FFFFFF"/>
-          </a:solidFill>
-          <a:ln w="12700">
-            <a:solidFill>
-              <a:srgbClr val="999999"/>
-            </a:solidFill>
-          </a:ln>
-        </p:spPr>
-        <p:style>
-          <a:lnRef idx="1">
-            <a:schemeClr val="accent1"/>
-          </a:lnRef>
-          <a:fillRef idx="3">
-            <a:schemeClr val="accent1"/>
-          </a:fillRef>
-          <a:effectRef idx="2">
-            <a:schemeClr val="accent1"/>
-          </a:effectRef>
-          <a:fontRef idx="minor">
-            <a:schemeClr val="lt1"/>
-          </a:fontRef>
-        </p:style>
-        <p:txBody>
-          <a:bodyPr rtlCol="0" anchor="ctr"/>
-          <a:lstStyle/>
-          <a:p>
-            <a:pPr algn="ctr"/>
-          </a:p>
-        </p:txBody>
-      </p:sp>
-      <p:sp>
-        <p:nvSpPr>
-          <p:cNvPr id="27" name="TextBox 26"/>
-          <p:cNvSpPr txBox="1"/>
-          <p:nvPr/>
-        </p:nvSpPr>
-        <p:spPr>
-          <a:xfrm>
-            <a:off x="1650000" y="4930000"/>
-            <a:ext cx="10100000" cy="550000"/>
-          </a:xfrm>
-          <a:prstGeom prst="rect">
-            <a:avLst/>
-          </a:prstGeom>
-          <a:noFill/>
-        </p:spPr>
-        <p:txBody>
-          <a:bodyPr wrap="square" anchor="ctr">
-            <a:spAutoFit/>
-          </a:bodyPr>
-          <a:lstStyle/>
-          <a:p>
-            <a:pPr algn="l"/>
-            <a:r>
-              <a:rPr sz="1300" b="0">
-                <a:solidFill>
-                  <a:srgbClr val="333333"/>
-                </a:solidFill>
-                <a:latin typeface="Open Sans"/>
-                <a:ea typeface="Open Sans"/>
-                <a:cs typeface="Open Sans"/>
-              </a:rPr>
-              <a:t>Спокойно объясняйте происходящее и оставайтесь рядом.</a:t>
+              <a:t>Насильственные действия не прекращают приступ, но могут причинить перелом, повреждение зубов или дыхательных путей.</a:t>
             </a:r>
           </a:p>
         </p:txBody>
@@ -7288,7 +8691,7 @@
                 <a:ea typeface="Open Sans"/>
                 <a:cs typeface="Open Sans"/>
               </a:rPr>
-              <a:t>ГЛАВНОЕ ЗАПОМНИТЬ</a:t>
+              <a:t>СРАЗУ ПОСЛЕ ОКОНЧАНИЯ СУДОРОГ</a:t>
             </a:r>
           </a:p>
         </p:txBody>
@@ -7455,14 +8858,94 @@
       </p:sp>
       <p:sp>
         <p:nvSpPr>
-          <p:cNvPr id="8" name="Rectangle 7"/>
+          <p:cNvPr id="8" name="Oval 7"/>
           <p:cNvSpPr/>
           <p:nvPr/>
         </p:nvSpPr>
         <p:spPr>
           <a:xfrm>
-            <a:off x="700000" y="1450000"/>
-            <a:ext cx="11000000" cy="833333"/>
+            <a:off x="700000" y="1400000"/>
+            <a:ext cx="500000" cy="500000"/>
+          </a:xfrm>
+          <a:prstGeom prst="ellipse">
+            <a:avLst/>
+          </a:prstGeom>
+          <a:solidFill>
+            <a:srgbClr val="CC0000"/>
+          </a:solidFill>
+          <a:ln>
+            <a:noFill/>
+          </a:ln>
+        </p:spPr>
+        <p:style>
+          <a:lnRef idx="1">
+            <a:schemeClr val="accent1"/>
+          </a:lnRef>
+          <a:fillRef idx="3">
+            <a:schemeClr val="accent1"/>
+          </a:fillRef>
+          <a:effectRef idx="2">
+            <a:schemeClr val="accent1"/>
+          </a:effectRef>
+          <a:fontRef idx="minor">
+            <a:schemeClr val="lt1"/>
+          </a:fontRef>
+        </p:style>
+        <p:txBody>
+          <a:bodyPr rtlCol="0" anchor="ctr"/>
+          <a:lstStyle/>
+          <a:p>
+            <a:pPr algn="ctr"/>
+          </a:p>
+        </p:txBody>
+      </p:sp>
+      <p:sp>
+        <p:nvSpPr>
+          <p:cNvPr id="9" name="TextBox 8"/>
+          <p:cNvSpPr txBox="1"/>
+          <p:nvPr/>
+        </p:nvSpPr>
+        <p:spPr>
+          <a:xfrm>
+            <a:off x="700000" y="1400000"/>
+            <a:ext cx="500000" cy="500000"/>
+          </a:xfrm>
+          <a:prstGeom prst="rect">
+            <a:avLst/>
+          </a:prstGeom>
+          <a:noFill/>
+        </p:spPr>
+        <p:txBody>
+          <a:bodyPr wrap="square" anchor="ctr">
+            <a:spAutoFit/>
+          </a:bodyPr>
+          <a:lstStyle/>
+          <a:p>
+            <a:pPr algn="ctr"/>
+            <a:r>
+              <a:rPr sz="1300" b="1">
+                <a:solidFill>
+                  <a:srgbClr val="FFFFFF"/>
+                </a:solidFill>
+                <a:latin typeface="Open Sans"/>
+                <a:ea typeface="Open Sans"/>
+                <a:cs typeface="Open Sans"/>
+              </a:rPr>
+              <a:t>1</a:t>
+            </a:r>
+          </a:p>
+        </p:txBody>
+      </p:sp>
+      <p:sp>
+        <p:nvSpPr>
+          <p:cNvPr id="10" name="Rectangle 9"/>
+          <p:cNvSpPr/>
+          <p:nvPr/>
+        </p:nvSpPr>
+        <p:spPr>
+          <a:xfrm>
+            <a:off x="1400000" y="1400000"/>
+            <a:ext cx="10550000" cy="620000"/>
           </a:xfrm>
           <a:prstGeom prst="rect">
             <a:avLst/>
@@ -7500,20 +8983,57 @@
       </p:sp>
       <p:sp>
         <p:nvSpPr>
-          <p:cNvPr id="9" name="Rectangle 8"/>
+          <p:cNvPr id="11" name="TextBox 10"/>
+          <p:cNvSpPr txBox="1"/>
+          <p:nvPr/>
+        </p:nvSpPr>
+        <p:spPr>
+          <a:xfrm>
+            <a:off x="1600000" y="1400000"/>
+            <a:ext cx="10150000" cy="620000"/>
+          </a:xfrm>
+          <a:prstGeom prst="rect">
+            <a:avLst/>
+          </a:prstGeom>
+          <a:noFill/>
+        </p:spPr>
+        <p:txBody>
+          <a:bodyPr wrap="square" anchor="ctr">
+            <a:spAutoFit/>
+          </a:bodyPr>
+          <a:lstStyle/>
+          <a:p>
+            <a:pPr algn="l"/>
+            <a:r>
+              <a:rPr sz="1300" b="0">
+                <a:solidFill>
+                  <a:srgbClr val="333333"/>
+                </a:solidFill>
+                <a:latin typeface="Open Sans"/>
+                <a:ea typeface="Open Sans"/>
+                <a:cs typeface="Open Sans"/>
+              </a:rPr>
+              <a:t>Откройте дыхательные пути и оцените нормальное дыхание.</a:t>
+            </a:r>
+          </a:p>
+        </p:txBody>
+      </p:sp>
+      <p:sp>
+        <p:nvSpPr>
+          <p:cNvPr id="12" name="Oval 11"/>
           <p:cNvSpPr/>
           <p:nvPr/>
         </p:nvSpPr>
         <p:spPr>
           <a:xfrm>
-            <a:off x="700000" y="1450000"/>
-            <a:ext cx="90000" cy="833333"/>
-          </a:xfrm>
-          <a:prstGeom prst="rect">
+            <a:off x="700000" y="2100000"/>
+            <a:ext cx="500000" cy="500000"/>
+          </a:xfrm>
+          <a:prstGeom prst="ellipse">
             <a:avLst/>
           </a:prstGeom>
           <a:solidFill>
-            <a:srgbClr val="CC0000"/>
+            <a:srgbClr val="555555"/>
           </a:solidFill>
           <a:ln>
             <a:noFill/>
@@ -7543,14 +9063,14 @@
       </p:sp>
       <p:sp>
         <p:nvSpPr>
-          <p:cNvPr id="10" name="TextBox 9"/>
+          <p:cNvPr id="13" name="TextBox 12"/>
           <p:cNvSpPr txBox="1"/>
           <p:nvPr/>
         </p:nvSpPr>
         <p:spPr>
           <a:xfrm>
-            <a:off x="1000000" y="1550000"/>
-            <a:ext cx="10400000" cy="633333"/>
+            <a:off x="700000" y="2100000"/>
+            <a:ext cx="500000" cy="500000"/>
           </a:xfrm>
           <a:prstGeom prst="rect">
             <a:avLst/>
@@ -7563,31 +9083,31 @@
           </a:bodyPr>
           <a:lstStyle/>
           <a:p>
-            <a:pPr algn="l"/>
-            <a:r>
-              <a:rPr sz="1300" b="0">
-                <a:solidFill>
-                  <a:srgbClr val="333333"/>
+            <a:pPr algn="ctr"/>
+            <a:r>
+              <a:rPr sz="1300" b="1">
+                <a:solidFill>
+                  <a:srgbClr val="FFFFFF"/>
                 </a:solidFill>
                 <a:latin typeface="Open Sans"/>
                 <a:ea typeface="Open Sans"/>
                 <a:cs typeface="Open Sans"/>
               </a:rPr>
-              <a:t>Уберите опасные предметы</a:t>
-            </a:r>
-          </a:p>
-        </p:txBody>
-      </p:sp>
-      <p:sp>
-        <p:nvSpPr>
-          <p:cNvPr id="11" name="Rectangle 10"/>
+              <a:t>2</a:t>
+            </a:r>
+          </a:p>
+        </p:txBody>
+      </p:sp>
+      <p:sp>
+        <p:nvSpPr>
+          <p:cNvPr id="14" name="Rectangle 13"/>
           <p:cNvSpPr/>
           <p:nvPr/>
         </p:nvSpPr>
         <p:spPr>
           <a:xfrm>
-            <a:off x="700000" y="2383333"/>
-            <a:ext cx="11000000" cy="833333"/>
+            <a:off x="1400000" y="2100000"/>
+            <a:ext cx="10550000" cy="620000"/>
           </a:xfrm>
           <a:prstGeom prst="rect">
             <a:avLst/>
@@ -7625,20 +9145,57 @@
       </p:sp>
       <p:sp>
         <p:nvSpPr>
-          <p:cNvPr id="12" name="Rectangle 11"/>
+          <p:cNvPr id="15" name="TextBox 14"/>
+          <p:cNvSpPr txBox="1"/>
+          <p:nvPr/>
+        </p:nvSpPr>
+        <p:spPr>
+          <a:xfrm>
+            <a:off x="1600000" y="2100000"/>
+            <a:ext cx="10150000" cy="620000"/>
+          </a:xfrm>
+          <a:prstGeom prst="rect">
+            <a:avLst/>
+          </a:prstGeom>
+          <a:noFill/>
+        </p:spPr>
+        <p:txBody>
+          <a:bodyPr wrap="square" anchor="ctr">
+            <a:spAutoFit/>
+          </a:bodyPr>
+          <a:lstStyle/>
+          <a:p>
+            <a:pPr algn="l"/>
+            <a:r>
+              <a:rPr sz="1300" b="0">
+                <a:solidFill>
+                  <a:srgbClr val="333333"/>
+                </a:solidFill>
+                <a:latin typeface="Open Sans"/>
+                <a:ea typeface="Open Sans"/>
+                <a:cs typeface="Open Sans"/>
+              </a:rPr>
+              <a:t>При отсутствии нормального дыхания начинайте реанимацию.</a:t>
+            </a:r>
+          </a:p>
+        </p:txBody>
+      </p:sp>
+      <p:sp>
+        <p:nvSpPr>
+          <p:cNvPr id="16" name="Oval 15"/>
           <p:cNvSpPr/>
           <p:nvPr/>
         </p:nvSpPr>
         <p:spPr>
           <a:xfrm>
-            <a:off x="700000" y="2383333"/>
-            <a:ext cx="90000" cy="833333"/>
-          </a:xfrm>
-          <a:prstGeom prst="rect">
+            <a:off x="700000" y="2800000"/>
+            <a:ext cx="500000" cy="500000"/>
+          </a:xfrm>
+          <a:prstGeom prst="ellipse">
             <a:avLst/>
           </a:prstGeom>
           <a:solidFill>
-            <a:srgbClr val="CC0000"/>
+            <a:srgbClr val="555555"/>
           </a:solidFill>
           <a:ln>
             <a:noFill/>
@@ -7668,14 +9225,14 @@
       </p:sp>
       <p:sp>
         <p:nvSpPr>
-          <p:cNvPr id="13" name="TextBox 12"/>
+          <p:cNvPr id="17" name="TextBox 16"/>
           <p:cNvSpPr txBox="1"/>
           <p:nvPr/>
         </p:nvSpPr>
         <p:spPr>
           <a:xfrm>
-            <a:off x="1000000" y="2483333"/>
-            <a:ext cx="10400000" cy="633333"/>
+            <a:off x="700000" y="2800000"/>
+            <a:ext cx="500000" cy="500000"/>
           </a:xfrm>
           <a:prstGeom prst="rect">
             <a:avLst/>
@@ -7688,31 +9245,31 @@
           </a:bodyPr>
           <a:lstStyle/>
           <a:p>
-            <a:pPr algn="l"/>
-            <a:r>
-              <a:rPr sz="1300" b="0">
-                <a:solidFill>
-                  <a:srgbClr val="333333"/>
+            <a:pPr algn="ctr"/>
+            <a:r>
+              <a:rPr sz="1300" b="1">
+                <a:solidFill>
+                  <a:srgbClr val="FFFFFF"/>
                 </a:solidFill>
                 <a:latin typeface="Open Sans"/>
                 <a:ea typeface="Open Sans"/>
                 <a:cs typeface="Open Sans"/>
               </a:rPr>
-              <a:t>Не удерживайте человека силой</a:t>
-            </a:r>
-          </a:p>
-        </p:txBody>
-      </p:sp>
-      <p:sp>
-        <p:nvSpPr>
-          <p:cNvPr id="14" name="Rectangle 13"/>
+              <a:t>3</a:t>
+            </a:r>
+          </a:p>
+        </p:txBody>
+      </p:sp>
+      <p:sp>
+        <p:nvSpPr>
+          <p:cNvPr id="18" name="Rectangle 17"/>
           <p:cNvSpPr/>
           <p:nvPr/>
         </p:nvSpPr>
         <p:spPr>
           <a:xfrm>
-            <a:off x="700000" y="3316666"/>
-            <a:ext cx="11000000" cy="833333"/>
+            <a:off x="1400000" y="2800000"/>
+            <a:ext cx="10550000" cy="620000"/>
           </a:xfrm>
           <a:prstGeom prst="rect">
             <a:avLst/>
@@ -7750,20 +9307,57 @@
       </p:sp>
       <p:sp>
         <p:nvSpPr>
-          <p:cNvPr id="15" name="Rectangle 14"/>
+          <p:cNvPr id="19" name="TextBox 18"/>
+          <p:cNvSpPr txBox="1"/>
+          <p:nvPr/>
+        </p:nvSpPr>
+        <p:spPr>
+          <a:xfrm>
+            <a:off x="1600000" y="2800000"/>
+            <a:ext cx="10150000" cy="620000"/>
+          </a:xfrm>
+          <a:prstGeom prst="rect">
+            <a:avLst/>
+          </a:prstGeom>
+          <a:noFill/>
+        </p:spPr>
+        <p:txBody>
+          <a:bodyPr wrap="square" anchor="ctr">
+            <a:spAutoFit/>
+          </a:bodyPr>
+          <a:lstStyle/>
+          <a:p>
+            <a:pPr algn="l"/>
+            <a:r>
+              <a:rPr sz="1300" b="0">
+                <a:solidFill>
+                  <a:srgbClr val="333333"/>
+                </a:solidFill>
+                <a:latin typeface="Open Sans"/>
+                <a:ea typeface="Open Sans"/>
+                <a:cs typeface="Open Sans"/>
+              </a:rPr>
+              <a:t>При сохраненном дыхании осмотрите рот и лицо на наличие крови и рвотных масс.</a:t>
+            </a:r>
+          </a:p>
+        </p:txBody>
+      </p:sp>
+      <p:sp>
+        <p:nvSpPr>
+          <p:cNvPr id="20" name="Oval 19"/>
           <p:cNvSpPr/>
           <p:nvPr/>
         </p:nvSpPr>
         <p:spPr>
           <a:xfrm>
-            <a:off x="700000" y="3316666"/>
-            <a:ext cx="90000" cy="833333"/>
-          </a:xfrm>
-          <a:prstGeom prst="rect">
+            <a:off x="700000" y="3500000"/>
+            <a:ext cx="500000" cy="500000"/>
+          </a:xfrm>
+          <a:prstGeom prst="ellipse">
             <a:avLst/>
           </a:prstGeom>
           <a:solidFill>
-            <a:srgbClr val="CC0000"/>
+            <a:srgbClr val="555555"/>
           </a:solidFill>
           <a:ln>
             <a:noFill/>
@@ -7793,14 +9387,14 @@
       </p:sp>
       <p:sp>
         <p:nvSpPr>
-          <p:cNvPr id="16" name="TextBox 15"/>
+          <p:cNvPr id="21" name="TextBox 20"/>
           <p:cNvSpPr txBox="1"/>
           <p:nvPr/>
         </p:nvSpPr>
         <p:spPr>
           <a:xfrm>
-            <a:off x="1000000" y="3416666"/>
-            <a:ext cx="10400000" cy="633333"/>
+            <a:off x="700000" y="3500000"/>
+            <a:ext cx="500000" cy="500000"/>
           </a:xfrm>
           <a:prstGeom prst="rect">
             <a:avLst/>
@@ -7813,31 +9407,31 @@
           </a:bodyPr>
           <a:lstStyle/>
           <a:p>
-            <a:pPr algn="l"/>
-            <a:r>
-              <a:rPr sz="1300" b="0">
-                <a:solidFill>
-                  <a:srgbClr val="333333"/>
+            <a:pPr algn="ctr"/>
+            <a:r>
+              <a:rPr sz="1300" b="1">
+                <a:solidFill>
+                  <a:srgbClr val="FFFFFF"/>
                 </a:solidFill>
                 <a:latin typeface="Open Sans"/>
                 <a:ea typeface="Open Sans"/>
                 <a:cs typeface="Open Sans"/>
               </a:rPr>
-              <a:t>Ничего не кладите в рот</a:t>
-            </a:r>
-          </a:p>
-        </p:txBody>
-      </p:sp>
-      <p:sp>
-        <p:nvSpPr>
-          <p:cNvPr id="17" name="Rectangle 16"/>
+              <a:t>4</a:t>
+            </a:r>
+          </a:p>
+        </p:txBody>
+      </p:sp>
+      <p:sp>
+        <p:nvSpPr>
+          <p:cNvPr id="22" name="Rectangle 21"/>
           <p:cNvSpPr/>
           <p:nvPr/>
         </p:nvSpPr>
         <p:spPr>
           <a:xfrm>
-            <a:off x="700000" y="4249999"/>
-            <a:ext cx="11000000" cy="833333"/>
+            <a:off x="1400000" y="3500000"/>
+            <a:ext cx="10550000" cy="620000"/>
           </a:xfrm>
           <a:prstGeom prst="rect">
             <a:avLst/>
@@ -7875,20 +9469,57 @@
       </p:sp>
       <p:sp>
         <p:nvSpPr>
-          <p:cNvPr id="18" name="Rectangle 17"/>
+          <p:cNvPr id="23" name="TextBox 22"/>
+          <p:cNvSpPr txBox="1"/>
+          <p:nvPr/>
+        </p:nvSpPr>
+        <p:spPr>
+          <a:xfrm>
+            <a:off x="1600000" y="3500000"/>
+            <a:ext cx="10150000" cy="620000"/>
+          </a:xfrm>
+          <a:prstGeom prst="rect">
+            <a:avLst/>
+          </a:prstGeom>
+          <a:noFill/>
+        </p:spPr>
+        <p:txBody>
+          <a:bodyPr wrap="square" anchor="ctr">
+            <a:spAutoFit/>
+          </a:bodyPr>
+          <a:lstStyle/>
+          <a:p>
+            <a:pPr algn="l"/>
+            <a:r>
+              <a:rPr sz="1300" b="0">
+                <a:solidFill>
+                  <a:srgbClr val="333333"/>
+                </a:solidFill>
+                <a:latin typeface="Open Sans"/>
+                <a:ea typeface="Open Sans"/>
+                <a:cs typeface="Open Sans"/>
+              </a:rPr>
+              <a:t>Проведите краткий обзорный осмотр и найдите сильное кровотечение.</a:t>
+            </a:r>
+          </a:p>
+        </p:txBody>
+      </p:sp>
+      <p:sp>
+        <p:nvSpPr>
+          <p:cNvPr id="24" name="Oval 23"/>
           <p:cNvSpPr/>
           <p:nvPr/>
         </p:nvSpPr>
         <p:spPr>
           <a:xfrm>
-            <a:off x="700000" y="4249999"/>
-            <a:ext cx="90000" cy="833333"/>
-          </a:xfrm>
-          <a:prstGeom prst="rect">
+            <a:off x="700000" y="4200000"/>
+            <a:ext cx="500000" cy="500000"/>
+          </a:xfrm>
+          <a:prstGeom prst="ellipse">
             <a:avLst/>
           </a:prstGeom>
           <a:solidFill>
-            <a:srgbClr val="CC0000"/>
+            <a:srgbClr val="555555"/>
           </a:solidFill>
           <a:ln>
             <a:noFill/>
@@ -7918,14 +9549,14 @@
       </p:sp>
       <p:sp>
         <p:nvSpPr>
-          <p:cNvPr id="19" name="TextBox 18"/>
+          <p:cNvPr id="25" name="TextBox 24"/>
           <p:cNvSpPr txBox="1"/>
           <p:nvPr/>
         </p:nvSpPr>
         <p:spPr>
           <a:xfrm>
-            <a:off x="1000000" y="4349999"/>
-            <a:ext cx="10400000" cy="633333"/>
+            <a:off x="700000" y="4200000"/>
+            <a:ext cx="500000" cy="500000"/>
           </a:xfrm>
           <a:prstGeom prst="rect">
             <a:avLst/>
@@ -7938,31 +9569,31 @@
           </a:bodyPr>
           <a:lstStyle/>
           <a:p>
-            <a:pPr algn="l"/>
-            <a:r>
-              <a:rPr sz="1300" b="0">
-                <a:solidFill>
-                  <a:srgbClr val="333333"/>
+            <a:pPr algn="ctr"/>
+            <a:r>
+              <a:rPr sz="1300" b="1">
+                <a:solidFill>
+                  <a:srgbClr val="FFFFFF"/>
                 </a:solidFill>
                 <a:latin typeface="Open Sans"/>
                 <a:ea typeface="Open Sans"/>
                 <a:cs typeface="Open Sans"/>
               </a:rPr>
-              <a:t>После приступа проверьте дыхание</a:t>
-            </a:r>
-          </a:p>
-        </p:txBody>
-      </p:sp>
-      <p:sp>
-        <p:nvSpPr>
-          <p:cNvPr id="20" name="Rectangle 19"/>
+              <a:t>5</a:t>
+            </a:r>
+          </a:p>
+        </p:txBody>
+      </p:sp>
+      <p:sp>
+        <p:nvSpPr>
+          <p:cNvPr id="26" name="Rectangle 25"/>
           <p:cNvSpPr/>
           <p:nvPr/>
         </p:nvSpPr>
         <p:spPr>
           <a:xfrm>
-            <a:off x="700000" y="5183332"/>
-            <a:ext cx="11000000" cy="833333"/>
+            <a:off x="1400000" y="4200000"/>
+            <a:ext cx="10550000" cy="620000"/>
           </a:xfrm>
           <a:prstGeom prst="rect">
             <a:avLst/>
@@ -8000,20 +9631,57 @@
       </p:sp>
       <p:sp>
         <p:nvSpPr>
-          <p:cNvPr id="21" name="Rectangle 20"/>
+          <p:cNvPr id="27" name="TextBox 26"/>
+          <p:cNvSpPr txBox="1"/>
+          <p:nvPr/>
+        </p:nvSpPr>
+        <p:spPr>
+          <a:xfrm>
+            <a:off x="1600000" y="4200000"/>
+            <a:ext cx="10150000" cy="620000"/>
+          </a:xfrm>
+          <a:prstGeom prst="rect">
+            <a:avLst/>
+          </a:prstGeom>
+          <a:noFill/>
+        </p:spPr>
+        <p:txBody>
+          <a:bodyPr wrap="square" anchor="ctr">
+            <a:spAutoFit/>
+          </a:bodyPr>
+          <a:lstStyle/>
+          <a:p>
+            <a:pPr algn="l"/>
+            <a:r>
+              <a:rPr sz="1300" b="0">
+                <a:solidFill>
+                  <a:srgbClr val="333333"/>
+                </a:solidFill>
+                <a:latin typeface="Open Sans"/>
+                <a:ea typeface="Open Sans"/>
+                <a:cs typeface="Open Sans"/>
+              </a:rPr>
+              <a:t>Вызовите скорую помощь и сообщите длительность приступа.</a:t>
+            </a:r>
+          </a:p>
+        </p:txBody>
+      </p:sp>
+      <p:sp>
+        <p:nvSpPr>
+          <p:cNvPr id="28" name="Oval 27"/>
           <p:cNvSpPr/>
           <p:nvPr/>
         </p:nvSpPr>
         <p:spPr>
           <a:xfrm>
-            <a:off x="700000" y="5183332"/>
-            <a:ext cx="90000" cy="833333"/>
-          </a:xfrm>
-          <a:prstGeom prst="rect">
+            <a:off x="700000" y="4900000"/>
+            <a:ext cx="500000" cy="500000"/>
+          </a:xfrm>
+          <a:prstGeom prst="ellipse">
             <a:avLst/>
           </a:prstGeom>
           <a:solidFill>
-            <a:srgbClr val="CC0000"/>
+            <a:srgbClr val="555555"/>
           </a:solidFill>
           <a:ln>
             <a:noFill/>
@@ -8043,14 +9711,14 @@
       </p:sp>
       <p:sp>
         <p:nvSpPr>
-          <p:cNvPr id="22" name="TextBox 21"/>
+          <p:cNvPr id="29" name="TextBox 28"/>
           <p:cNvSpPr txBox="1"/>
           <p:nvPr/>
         </p:nvSpPr>
         <p:spPr>
           <a:xfrm>
-            <a:off x="1000000" y="5283332"/>
-            <a:ext cx="10400000" cy="633333"/>
+            <a:off x="700000" y="4900000"/>
+            <a:ext cx="500000" cy="500000"/>
           </a:xfrm>
           <a:prstGeom prst="rect">
             <a:avLst/>
@@ -8063,31 +9731,31 @@
           </a:bodyPr>
           <a:lstStyle/>
           <a:p>
-            <a:pPr algn="l"/>
-            <a:r>
-              <a:rPr sz="1300" b="0">
-                <a:solidFill>
-                  <a:srgbClr val="333333"/>
+            <a:pPr algn="ctr"/>
+            <a:r>
+              <a:rPr sz="1300" b="1">
+                <a:solidFill>
+                  <a:srgbClr val="FFFFFF"/>
                 </a:solidFill>
                 <a:latin typeface="Open Sans"/>
                 <a:ea typeface="Open Sans"/>
                 <a:cs typeface="Open Sans"/>
               </a:rPr>
-              <a:t>Дышит — уложите на бок</a:t>
-            </a:r>
-          </a:p>
-        </p:txBody>
-      </p:sp>
-      <p:sp>
-        <p:nvSpPr>
-          <p:cNvPr id="23" name="Rectangle 22"/>
+              <a:t>6</a:t>
+            </a:r>
+          </a:p>
+        </p:txBody>
+      </p:sp>
+      <p:sp>
+        <p:nvSpPr>
+          <p:cNvPr id="30" name="Rectangle 29"/>
           <p:cNvSpPr/>
           <p:nvPr/>
         </p:nvSpPr>
         <p:spPr>
           <a:xfrm>
-            <a:off x="700000" y="6116665"/>
-            <a:ext cx="11000000" cy="833333"/>
+            <a:off x="1400000" y="4900000"/>
+            <a:ext cx="10550000" cy="620000"/>
           </a:xfrm>
           <a:prstGeom prst="rect">
             <a:avLst/>
@@ -8125,57 +9793,14 @@
       </p:sp>
       <p:sp>
         <p:nvSpPr>
-          <p:cNvPr id="24" name="Rectangle 23"/>
-          <p:cNvSpPr/>
-          <p:nvPr/>
-        </p:nvSpPr>
-        <p:spPr>
-          <a:xfrm>
-            <a:off x="700000" y="6116665"/>
-            <a:ext cx="90000" cy="833333"/>
-          </a:xfrm>
-          <a:prstGeom prst="rect">
-            <a:avLst/>
-          </a:prstGeom>
-          <a:solidFill>
-            <a:srgbClr val="CC0000"/>
-          </a:solidFill>
-          <a:ln>
-            <a:noFill/>
-          </a:ln>
-        </p:spPr>
-        <p:style>
-          <a:lnRef idx="1">
-            <a:schemeClr val="accent1"/>
-          </a:lnRef>
-          <a:fillRef idx="3">
-            <a:schemeClr val="accent1"/>
-          </a:fillRef>
-          <a:effectRef idx="2">
-            <a:schemeClr val="accent1"/>
-          </a:effectRef>
-          <a:fontRef idx="minor">
-            <a:schemeClr val="lt1"/>
-          </a:fontRef>
-        </p:style>
-        <p:txBody>
-          <a:bodyPr rtlCol="0" anchor="ctr"/>
-          <a:lstStyle/>
-          <a:p>
-            <a:pPr algn="ctr"/>
-          </a:p>
-        </p:txBody>
-      </p:sp>
-      <p:sp>
-        <p:nvSpPr>
-          <p:cNvPr id="25" name="TextBox 24"/>
+          <p:cNvPr id="31" name="TextBox 30"/>
           <p:cNvSpPr txBox="1"/>
           <p:nvPr/>
         </p:nvSpPr>
         <p:spPr>
           <a:xfrm>
-            <a:off x="1000000" y="6216665"/>
-            <a:ext cx="10400000" cy="633333"/>
+            <a:off x="1600000" y="4900000"/>
+            <a:ext cx="10150000" cy="620000"/>
           </a:xfrm>
           <a:prstGeom prst="rect">
             <a:avLst/>
@@ -8198,7 +9823,7 @@
                 <a:ea typeface="Open Sans"/>
                 <a:cs typeface="Open Sans"/>
               </a:rPr>
-              <a:t>Оставайтесь рядом до приезда скорой</a:t>
+              <a:t>Продолжайте наблюдение: приступ может повториться.</a:t>
             </a:r>
           </a:p>
         </p:txBody>
@@ -8296,7 +9921,7 @@
                 <a:ea typeface="Open Sans"/>
                 <a:cs typeface="Open Sans"/>
               </a:rPr>
-              <a:t>ПАМЯТКА</a:t>
+              <a:t>ПРОВЕРЬТЕ ТРАВМЫ И КРОВОТЕЧЕНИЕ</a:t>
             </a:r>
           </a:p>
         </p:txBody>
@@ -8461,30 +10086,137 @@
           </a:p>
         </p:txBody>
       </p:sp>
-      <p:pic>
-        <p:nvPicPr>
-          <p:cNvPr id="8" name="Picture 7" descr="pamyatka-tema4-sudorogi-16x9.png"/>
-          <p:cNvPicPr>
-            <a:picLocks noChangeAspect="1"/>
-          </p:cNvPicPr>
-          <p:nvPr/>
-        </p:nvPicPr>
-        <p:blipFill>
-          <a:blip r:embed="rId2"/>
-          <a:stretch>
-            <a:fillRect/>
-          </a:stretch>
-        </p:blipFill>
-        <p:spPr>
-          <a:xfrm>
-            <a:off x="2300000" y="1400000"/>
-            <a:ext cx="7800000" cy="5200000"/>
-          </a:xfrm>
-          <a:prstGeom prst="rect">
-            <a:avLst/>
-          </a:prstGeom>
-        </p:spPr>
-      </p:pic>
+      <p:sp>
+        <p:nvSpPr>
+          <p:cNvPr id="8" name="TextBox 7"/>
+          <p:cNvSpPr txBox="1"/>
+          <p:nvPr/>
+        </p:nvSpPr>
+        <p:spPr>
+          <a:xfrm>
+            <a:off x="700000" y="1450000"/>
+            <a:ext cx="11000000" cy="4000000"/>
+          </a:xfrm>
+          <a:prstGeom prst="rect">
+            <a:avLst/>
+          </a:prstGeom>
+          <a:noFill/>
+        </p:spPr>
+        <p:txBody>
+          <a:bodyPr wrap="square">
+            <a:spAutoFit/>
+          </a:bodyPr>
+          <a:lstStyle/>
+          <a:p>
+            <a:pPr algn="l">
+              <a:spcAft>
+                <a:spcPts val="800"/>
+              </a:spcAft>
+            </a:pPr>
+            <a:r>
+              <a:rPr sz="1400" b="0">
+                <a:solidFill>
+                  <a:srgbClr val="333333"/>
+                </a:solidFill>
+                <a:latin typeface="Open Sans"/>
+                <a:ea typeface="Open Sans"/>
+                <a:cs typeface="Open Sans"/>
+              </a:rPr>
+              <a:t>•  Осмотрите голову, лицо и область вокруг пострадавшего.</a:t>
+            </a:r>
+          </a:p>
+          <a:p>
+            <a:pPr algn="l">
+              <a:spcAft>
+                <a:spcPts val="800"/>
+              </a:spcAft>
+            </a:pPr>
+            <a:r>
+              <a:rPr sz="1400" b="0">
+                <a:solidFill>
+                  <a:srgbClr val="333333"/>
+                </a:solidFill>
+                <a:latin typeface="Open Sans"/>
+                <a:ea typeface="Open Sans"/>
+                <a:cs typeface="Open Sans"/>
+              </a:rPr>
+              <a:t>•  Ищите раны, кровь, ожоги, деформацию и болезненность.</a:t>
+            </a:r>
+          </a:p>
+          <a:p>
+            <a:pPr algn="l">
+              <a:spcAft>
+                <a:spcPts val="800"/>
+              </a:spcAft>
+            </a:pPr>
+            <a:r>
+              <a:rPr sz="1400" b="0">
+                <a:solidFill>
+                  <a:srgbClr val="333333"/>
+                </a:solidFill>
+                <a:latin typeface="Open Sans"/>
+                <a:ea typeface="Open Sans"/>
+                <a:cs typeface="Open Sans"/>
+              </a:rPr>
+              <a:t>•  Сильное наружное кровотечение остановите немедленно.</a:t>
+            </a:r>
+          </a:p>
+          <a:p>
+            <a:pPr algn="l">
+              <a:spcAft>
+                <a:spcPts val="800"/>
+              </a:spcAft>
+            </a:pPr>
+            <a:r>
+              <a:rPr sz="1400" b="0">
+                <a:solidFill>
+                  <a:srgbClr val="333333"/>
+                </a:solidFill>
+                <a:latin typeface="Open Sans"/>
+                <a:ea typeface="Open Sans"/>
+                <a:cs typeface="Open Sans"/>
+              </a:rPr>
+              <a:t>•  Небольшие раны закройте чистой повязкой.</a:t>
+            </a:r>
+          </a:p>
+          <a:p>
+            <a:pPr algn="l">
+              <a:spcAft>
+                <a:spcPts val="800"/>
+              </a:spcAft>
+            </a:pPr>
+            <a:r>
+              <a:rPr sz="1400" b="0">
+                <a:solidFill>
+                  <a:srgbClr val="333333"/>
+                </a:solidFill>
+                <a:latin typeface="Open Sans"/>
+                <a:ea typeface="Open Sans"/>
+                <a:cs typeface="Open Sans"/>
+              </a:rPr>
+              <a:t>•  При подозрении на перелом не выпрямляйте конечность и обеспечьте покой.</a:t>
+            </a:r>
+          </a:p>
+          <a:p>
+            <a:pPr algn="l">
+              <a:spcAft>
+                <a:spcPts val="800"/>
+              </a:spcAft>
+            </a:pPr>
+            <a:r>
+              <a:rPr sz="1400" b="0">
+                <a:solidFill>
+                  <a:srgbClr val="333333"/>
+                </a:solidFill>
+                <a:latin typeface="Open Sans"/>
+                <a:ea typeface="Open Sans"/>
+                <a:cs typeface="Open Sans"/>
+              </a:rPr>
+              <a:t>•  При падении учитывайте возможность травмы головы и позвоночника.</a:t>
+            </a:r>
+          </a:p>
+        </p:txBody>
+      </p:sp>
     </p:spTree>
   </p:cSld>
   <p:clrMapOvr>
@@ -8512,13 +10244,13 @@
         <p:spPr>
           <a:xfrm>
             <a:off x="0" y="0"/>
-            <a:ext cx="3400000" cy="6858000"/>
+            <a:ext cx="12191695" cy="6858000"/>
           </a:xfrm>
           <a:prstGeom prst="rect">
             <a:avLst/>
           </a:prstGeom>
           <a:solidFill>
-            <a:srgbClr val="DDDDDD"/>
+            <a:srgbClr val="FFFFFF"/>
           </a:solidFill>
           <a:ln>
             <a:noFill/>
@@ -8548,20 +10280,57 @@
       </p:sp>
       <p:sp>
         <p:nvSpPr>
-          <p:cNvPr id="3" name="Rectangle 2"/>
+          <p:cNvPr id="3" name="TextBox 2"/>
+          <p:cNvSpPr txBox="1"/>
+          <p:nvPr/>
+        </p:nvSpPr>
+        <p:spPr>
+          <a:xfrm>
+            <a:off x="700000" y="250000"/>
+            <a:ext cx="11200000" cy="550000"/>
+          </a:xfrm>
+          <a:prstGeom prst="rect">
+            <a:avLst/>
+          </a:prstGeom>
+          <a:noFill/>
+        </p:spPr>
+        <p:txBody>
+          <a:bodyPr wrap="square" anchor="t">
+            <a:spAutoFit/>
+          </a:bodyPr>
+          <a:lstStyle/>
+          <a:p>
+            <a:pPr algn="l"/>
+            <a:r>
+              <a:rPr sz="2200" b="1">
+                <a:solidFill>
+                  <a:srgbClr val="333333"/>
+                </a:solidFill>
+                <a:latin typeface="Open Sans"/>
+                <a:ea typeface="Open Sans"/>
+                <a:cs typeface="Open Sans"/>
+              </a:rPr>
+              <a:t>ВОССТАНОВИТЕЛЬНОЕ ПОЛОЖЕНИЕ</a:t>
+            </a:r>
+          </a:p>
+        </p:txBody>
+      </p:sp>
+      <p:sp>
+        <p:nvSpPr>
+          <p:cNvPr id="4" name="Rectangle 3"/>
           <p:cNvSpPr/>
           <p:nvPr/>
         </p:nvSpPr>
         <p:spPr>
           <a:xfrm>
-            <a:off x="3400000" y="0"/>
-            <a:ext cx="8800000" cy="6858000"/>
+            <a:off x="700000" y="850000"/>
+            <a:ext cx="9000000" cy="28000"/>
           </a:xfrm>
           <a:prstGeom prst="rect">
             <a:avLst/>
           </a:prstGeom>
           <a:solidFill>
-            <a:srgbClr val="F8F8F8"/>
+            <a:srgbClr val="555555"/>
           </a:solidFill>
           <a:ln>
             <a:noFill/>
@@ -8591,14 +10360,14 @@
       </p:sp>
       <p:sp>
         <p:nvSpPr>
-          <p:cNvPr id="4" name="TextBox 3"/>
+          <p:cNvPr id="5" name="TextBox 4"/>
           <p:cNvSpPr txBox="1"/>
           <p:nvPr/>
         </p:nvSpPr>
         <p:spPr>
           <a:xfrm>
-            <a:off x="4000000" y="3000000"/>
-            <a:ext cx="7500000" cy="1000000"/>
+            <a:off x="700000" y="920000"/>
+            <a:ext cx="11000000" cy="350000"/>
           </a:xfrm>
           <a:prstGeom prst="rect">
             <a:avLst/>
@@ -8606,42 +10375,42 @@
           <a:noFill/>
         </p:spPr>
         <p:txBody>
-          <a:bodyPr wrap="square" anchor="ctr">
+          <a:bodyPr wrap="square" anchor="t">
             <a:spAutoFit/>
           </a:bodyPr>
           <a:lstStyle/>
           <a:p>
             <a:pPr algn="l"/>
             <a:r>
-              <a:rPr sz="3000" b="1">
-                <a:solidFill>
-                  <a:srgbClr val="333333"/>
+              <a:rPr sz="1200" b="0">
+                <a:solidFill>
+                  <a:srgbClr val="666666"/>
                 </a:solidFill>
                 <a:latin typeface="Open Sans"/>
                 <a:ea typeface="Open Sans"/>
                 <a:cs typeface="Open Sans"/>
               </a:rPr>
-              <a:t>БЛАГОДАРИМ ЗА ВНИМАНИЕ</a:t>
-            </a:r>
-          </a:p>
-        </p:txBody>
-      </p:sp>
-      <p:sp>
-        <p:nvSpPr>
-          <p:cNvPr id="5" name="Rectangle 4"/>
+              <a:t>Оказание первой помощи при травмах, ранениях и поражениях, прочих состояниях</a:t>
+            </a:r>
+          </a:p>
+        </p:txBody>
+      </p:sp>
+      <p:sp>
+        <p:nvSpPr>
+          <p:cNvPr id="6" name="Rectangle 5"/>
           <p:cNvSpPr/>
           <p:nvPr/>
         </p:nvSpPr>
         <p:spPr>
           <a:xfrm>
-            <a:off x="4000000" y="4100000"/>
-            <a:ext cx="4500000" cy="30000"/>
+            <a:off x="0" y="2800000"/>
+            <a:ext cx="420000" cy="420000"/>
           </a:xfrm>
           <a:prstGeom prst="rect">
             <a:avLst/>
           </a:prstGeom>
           <a:solidFill>
-            <a:srgbClr val="333333"/>
+            <a:srgbClr val="555555"/>
           </a:solidFill>
           <a:ln>
             <a:noFill/>
@@ -8666,6 +10435,260 @@
           <a:lstStyle/>
           <a:p>
             <a:pPr algn="ctr"/>
+          </a:p>
+        </p:txBody>
+      </p:sp>
+      <p:sp>
+        <p:nvSpPr>
+          <p:cNvPr id="7" name="TextBox 6"/>
+          <p:cNvSpPr txBox="1"/>
+          <p:nvPr/>
+        </p:nvSpPr>
+        <p:spPr>
+          <a:xfrm>
+            <a:off x="0" y="2800000"/>
+            <a:ext cx="420000" cy="420000"/>
+          </a:xfrm>
+          <a:prstGeom prst="rect">
+            <a:avLst/>
+          </a:prstGeom>
+          <a:noFill/>
+        </p:spPr>
+        <p:txBody>
+          <a:bodyPr wrap="square" anchor="ctr">
+            <a:spAutoFit/>
+          </a:bodyPr>
+          <a:lstStyle/>
+          <a:p>
+            <a:pPr algn="ctr"/>
+            <a:r>
+              <a:rPr sz="1400" b="1">
+                <a:solidFill>
+                  <a:srgbClr val="FFFFFF"/>
+                </a:solidFill>
+                <a:latin typeface="Open Sans"/>
+                <a:ea typeface="Open Sans"/>
+                <a:cs typeface="Open Sans"/>
+              </a:rPr>
+              <a:t>9</a:t>
+            </a:r>
+          </a:p>
+        </p:txBody>
+      </p:sp>
+      <p:pic>
+        <p:nvPicPr>
+          <p:cNvPr id="8" name="Picture 7" descr="fig76.jpeg"/>
+          <p:cNvPicPr>
+            <a:picLocks noChangeAspect="1"/>
+          </p:cNvPicPr>
+          <p:nvPr/>
+        </p:nvPicPr>
+        <p:blipFill>
+          <a:blip r:embed="rId2"/>
+          <a:stretch>
+            <a:fillRect/>
+          </a:stretch>
+        </p:blipFill>
+        <p:spPr>
+          <a:xfrm>
+            <a:off x="500000" y="1993594"/>
+            <a:ext cx="5200000" cy="2912812"/>
+          </a:xfrm>
+          <a:prstGeom prst="rect">
+            <a:avLst/>
+          </a:prstGeom>
+        </p:spPr>
+      </p:pic>
+      <p:sp>
+        <p:nvSpPr>
+          <p:cNvPr id="9" name="TextBox 8"/>
+          <p:cNvSpPr txBox="1"/>
+          <p:nvPr/>
+        </p:nvSpPr>
+        <p:spPr>
+          <a:xfrm>
+            <a:off x="6000000" y="1450000"/>
+            <a:ext cx="6200000" cy="3800000"/>
+          </a:xfrm>
+          <a:prstGeom prst="rect">
+            <a:avLst/>
+          </a:prstGeom>
+          <a:noFill/>
+        </p:spPr>
+        <p:txBody>
+          <a:bodyPr wrap="square">
+            <a:spAutoFit/>
+          </a:bodyPr>
+          <a:lstStyle/>
+          <a:p>
+            <a:pPr algn="l">
+              <a:spcAft>
+                <a:spcPts val="800"/>
+              </a:spcAft>
+            </a:pPr>
+            <a:r>
+              <a:rPr sz="1300" b="0">
+                <a:solidFill>
+                  <a:srgbClr val="333333"/>
+                </a:solidFill>
+                <a:latin typeface="Open Sans"/>
+                <a:ea typeface="Open Sans"/>
+                <a:cs typeface="Open Sans"/>
+              </a:rPr>
+              <a:t>•  Человека без сознания, но с нормальным дыханием осторожно уложите на бок.</a:t>
+            </a:r>
+          </a:p>
+          <a:p>
+            <a:pPr algn="l">
+              <a:spcAft>
+                <a:spcPts val="800"/>
+              </a:spcAft>
+            </a:pPr>
+            <a:r>
+              <a:rPr sz="1300" b="0">
+                <a:solidFill>
+                  <a:srgbClr val="333333"/>
+                </a:solidFill>
+                <a:latin typeface="Open Sans"/>
+                <a:ea typeface="Open Sans"/>
+                <a:cs typeface="Open Sans"/>
+              </a:rPr>
+              <a:t>•  Обеспечьте устойчивость положения и свободное оттекание жидкости изо рта.</a:t>
+            </a:r>
+          </a:p>
+          <a:p>
+            <a:pPr algn="l">
+              <a:spcAft>
+                <a:spcPts val="800"/>
+              </a:spcAft>
+            </a:pPr>
+            <a:r>
+              <a:rPr sz="1300" b="0">
+                <a:solidFill>
+                  <a:srgbClr val="333333"/>
+                </a:solidFill>
+                <a:latin typeface="Open Sans"/>
+                <a:ea typeface="Open Sans"/>
+                <a:cs typeface="Open Sans"/>
+              </a:rPr>
+              <a:t>•  Не запрокидывайте голову чрезмерно при подозрении на травму шеи.</a:t>
+            </a:r>
+          </a:p>
+          <a:p>
+            <a:pPr algn="l">
+              <a:spcAft>
+                <a:spcPts val="800"/>
+              </a:spcAft>
+            </a:pPr>
+            <a:r>
+              <a:rPr sz="1300" b="0">
+                <a:solidFill>
+                  <a:srgbClr val="333333"/>
+                </a:solidFill>
+                <a:latin typeface="Open Sans"/>
+                <a:ea typeface="Open Sans"/>
+                <a:cs typeface="Open Sans"/>
+              </a:rPr>
+              <a:t>•  Регулярно проверяйте дыхание и цвет кожи.</a:t>
+            </a:r>
+          </a:p>
+          <a:p>
+            <a:pPr algn="l">
+              <a:spcAft>
+                <a:spcPts val="800"/>
+              </a:spcAft>
+            </a:pPr>
+            <a:r>
+              <a:rPr sz="1300" b="0">
+                <a:solidFill>
+                  <a:srgbClr val="333333"/>
+                </a:solidFill>
+                <a:latin typeface="Open Sans"/>
+                <a:ea typeface="Open Sans"/>
+                <a:cs typeface="Open Sans"/>
+              </a:rPr>
+              <a:t>•  Если дыхание стало ненормальным, переверните на спину и начинайте реанимацию.</a:t>
+            </a:r>
+          </a:p>
+        </p:txBody>
+      </p:sp>
+      <p:sp>
+        <p:nvSpPr>
+          <p:cNvPr id="10" name="Rounded Rectangle 9"/>
+          <p:cNvSpPr/>
+          <p:nvPr/>
+        </p:nvSpPr>
+        <p:spPr>
+          <a:xfrm>
+            <a:off x="6000000" y="5400000"/>
+            <a:ext cx="6200000" cy="1100000"/>
+          </a:xfrm>
+          <a:prstGeom prst="roundRect">
+            <a:avLst/>
+          </a:prstGeom>
+          <a:solidFill>
+            <a:srgbClr val="F5F0E1"/>
+          </a:solidFill>
+          <a:ln>
+            <a:noFill/>
+          </a:ln>
+        </p:spPr>
+        <p:style>
+          <a:lnRef idx="1">
+            <a:schemeClr val="accent1"/>
+          </a:lnRef>
+          <a:fillRef idx="3">
+            <a:schemeClr val="accent1"/>
+          </a:fillRef>
+          <a:effectRef idx="2">
+            <a:schemeClr val="accent1"/>
+          </a:effectRef>
+          <a:fontRef idx="minor">
+            <a:schemeClr val="lt1"/>
+          </a:fontRef>
+        </p:style>
+        <p:txBody>
+          <a:bodyPr rtlCol="0" anchor="ctr"/>
+          <a:lstStyle/>
+          <a:p>
+            <a:pPr algn="ctr"/>
+          </a:p>
+        </p:txBody>
+      </p:sp>
+      <p:sp>
+        <p:nvSpPr>
+          <p:cNvPr id="11" name="TextBox 10"/>
+          <p:cNvSpPr txBox="1"/>
+          <p:nvPr/>
+        </p:nvSpPr>
+        <p:spPr>
+          <a:xfrm>
+            <a:off x="6250000" y="5600000"/>
+            <a:ext cx="5700000" cy="700000"/>
+          </a:xfrm>
+          <a:prstGeom prst="rect">
+            <a:avLst/>
+          </a:prstGeom>
+          <a:noFill/>
+        </p:spPr>
+        <p:txBody>
+          <a:bodyPr wrap="square" anchor="ctr">
+            <a:spAutoFit/>
+          </a:bodyPr>
+          <a:lstStyle/>
+          <a:p>
+            <a:pPr algn="l"/>
+            <a:r>
+              <a:rPr sz="1200" b="0">
+                <a:solidFill>
+                  <a:srgbClr val="333333"/>
+                </a:solidFill>
+                <a:latin typeface="Open Sans"/>
+                <a:ea typeface="Open Sans"/>
+                <a:cs typeface="Open Sans"/>
+              </a:rPr>
+              <a:t>После приступа человек может быть сонливым, растерянным и не помнить произошедшее.</a:t>
+            </a:r>
           </a:p>
         </p:txBody>
       </p:sp>
